--- a/curso/pptx/S48.pptx
+++ b/curso/pptx/S48.pptx
@@ -3818,8 +3818,8 @@
         </p:nvSpPr>
         <p:spPr>
           <a:xfrm>
-            <a:off x="640000" y="420000"/>
-            <a:ext cx="10912000" cy="420000"/>
+            <a:off x="10652000" y="380000"/>
+            <a:ext cx="900000" cy="800000"/>
           </a:xfrm>
           <a:prstGeom prst="rect">
             <a:avLst/>
@@ -3834,17 +3834,17 @@
           <a:p>
             <a:pPr>
               <a:spcAft>
-                <a:spcPts val="810"/>
+                <a:spcPts val="1980"/>
               </a:spcAft>
             </a:pPr>
             <a:r>
-              <a:rPr sz="1800" b="1">
+              <a:rPr sz="4400" b="0">
                 <a:solidFill>
                   <a:srgbClr val="1F2A44"/>
                 </a:solidFill>
                 <a:latin typeface="Nunito Sans"/>
               </a:rPr>
-              <a:t>🦉 Aula de Filosofía</a:t>
+              <a:t>🙃</a:t>
             </a:r>
           </a:p>
         </p:txBody>

--- a/curso/pptx/S48.pptx
+++ b/curso/pptx/S48.pptx
@@ -469,356 +469,6 @@
     </a:lvl9pPr>
   </p:notesStyle>
 </p:notesMaster>
-</file>
-
-<file path=ppt/notesSlides/notesSlide1.xml><?xml version="1.0" encoding="utf-8"?>
-<p:notes xmlns:a="http://schemas.openxmlformats.org/drawingml/2006/main" xmlns:p="http://schemas.openxmlformats.org/presentationml/2006/main" xmlns:r="http://schemas.openxmlformats.org/officeDocument/2006/relationships">
-  <p:cSld>
-    <p:spTree>
-      <p:nvGrpSpPr>
-        <p:cNvPr id="1" name=""/>
-        <p:cNvGrpSpPr/>
-        <p:nvPr/>
-      </p:nvGrpSpPr>
-      <p:grpSpPr>
-        <a:xfrm>
-          <a:off x="0" y="0"/>
-          <a:ext cx="0" cy="0"/>
-          <a:chOff x="0" y="0"/>
-          <a:chExt cx="0" cy="0"/>
-        </a:xfrm>
-      </p:grpSpPr>
-      <p:sp>
-        <p:nvSpPr>
-          <p:cNvPr id="2" name="Slide Image Placeholder 1"/>
-          <p:cNvSpPr>
-            <a:spLocks noGrp="1"/>
-          </p:cNvSpPr>
-          <p:nvPr>
-            <p:ph type="sldImg" idx="2"/>
-          </p:nvPr>
-        </p:nvSpPr>
-        <p:spPr/>
-      </p:sp>
-      <p:sp>
-        <p:nvSpPr>
-          <p:cNvPr id="3" name="Notes Placeholder 2"/>
-          <p:cNvSpPr>
-            <a:spLocks noGrp="1"/>
-          </p:cNvSpPr>
-          <p:nvPr>
-            <p:ph type="body" idx="3" sz="quarter"/>
-          </p:nvPr>
-        </p:nvSpPr>
-        <p:spPr/>
-        <p:txBody>
-          <a:bodyPr/>
-          <a:lstStyle/>
-          <a:p>
-            <a:r>
-              <a:t>3 minutos. Sin apuntes. Es para recordar, no cuenta para nota.</a:t>
-            </a:r>
-          </a:p>
-        </p:txBody>
-      </p:sp>
-      <p:sp>
-        <p:nvSpPr>
-          <p:cNvPr id="4" name="Slide Number Placeholder 3"/>
-          <p:cNvSpPr>
-            <a:spLocks noGrp="1"/>
-          </p:cNvSpPr>
-          <p:nvPr>
-            <p:ph type="sldNum" idx="5" sz="quarter"/>
-          </p:nvPr>
-        </p:nvSpPr>
-        <p:spPr/>
-      </p:sp>
-    </p:spTree>
-  </p:cSld>
-  <p:clrMapOvr>
-    <a:masterClrMapping/>
-  </p:clrMapOvr>
-</p:notes>
-</file>
-
-<file path=ppt/notesSlides/notesSlide2.xml><?xml version="1.0" encoding="utf-8"?>
-<p:notes xmlns:a="http://schemas.openxmlformats.org/drawingml/2006/main" xmlns:p="http://schemas.openxmlformats.org/presentationml/2006/main" xmlns:r="http://schemas.openxmlformats.org/officeDocument/2006/relationships">
-  <p:cSld>
-    <p:spTree>
-      <p:nvGrpSpPr>
-        <p:cNvPr id="1" name=""/>
-        <p:cNvGrpSpPr/>
-        <p:nvPr/>
-      </p:nvGrpSpPr>
-      <p:grpSpPr>
-        <a:xfrm>
-          <a:off x="0" y="0"/>
-          <a:ext cx="0" cy="0"/>
-          <a:chOff x="0" y="0"/>
-          <a:chExt cx="0" cy="0"/>
-        </a:xfrm>
-      </p:grpSpPr>
-      <p:sp>
-        <p:nvSpPr>
-          <p:cNvPr id="2" name="Slide Image Placeholder 1"/>
-          <p:cNvSpPr>
-            <a:spLocks noGrp="1"/>
-          </p:cNvSpPr>
-          <p:nvPr>
-            <p:ph type="sldImg" idx="2"/>
-          </p:nvPr>
-        </p:nvSpPr>
-        <p:spPr/>
-      </p:sp>
-      <p:sp>
-        <p:nvSpPr>
-          <p:cNvPr id="3" name="Notes Placeholder 2"/>
-          <p:cNvSpPr>
-            <a:spLocks noGrp="1"/>
-          </p:cNvSpPr>
-          <p:nvPr>
-            <p:ph type="body" idx="3" sz="quarter"/>
-          </p:nvPr>
-        </p:nvSpPr>
-        <p:spPr/>
-        <p:txBody>
-          <a:bodyPr/>
-          <a:lstStyle/>
-          <a:p>
-            <a:r>
-              <a:t>3 minutos. Sin apuntes. Es para recordar, no cuenta para nota.</a:t>
-            </a:r>
-          </a:p>
-        </p:txBody>
-      </p:sp>
-      <p:sp>
-        <p:nvSpPr>
-          <p:cNvPr id="4" name="Slide Number Placeholder 3"/>
-          <p:cNvSpPr>
-            <a:spLocks noGrp="1"/>
-          </p:cNvSpPr>
-          <p:nvPr>
-            <p:ph type="sldNum" idx="5" sz="quarter"/>
-          </p:nvPr>
-        </p:nvSpPr>
-        <p:spPr/>
-      </p:sp>
-    </p:spTree>
-  </p:cSld>
-  <p:clrMapOvr>
-    <a:masterClrMapping/>
-  </p:clrMapOvr>
-</p:notes>
-</file>
-
-<file path=ppt/notesSlides/notesSlide3.xml><?xml version="1.0" encoding="utf-8"?>
-<p:notes xmlns:a="http://schemas.openxmlformats.org/drawingml/2006/main" xmlns:p="http://schemas.openxmlformats.org/presentationml/2006/main" xmlns:r="http://schemas.openxmlformats.org/officeDocument/2006/relationships">
-  <p:cSld>
-    <p:spTree>
-      <p:nvGrpSpPr>
-        <p:cNvPr id="1" name=""/>
-        <p:cNvGrpSpPr/>
-        <p:nvPr/>
-      </p:nvGrpSpPr>
-      <p:grpSpPr>
-        <a:xfrm>
-          <a:off x="0" y="0"/>
-          <a:ext cx="0" cy="0"/>
-          <a:chOff x="0" y="0"/>
-          <a:chExt cx="0" cy="0"/>
-        </a:xfrm>
-      </p:grpSpPr>
-      <p:sp>
-        <p:nvSpPr>
-          <p:cNvPr id="2" name="Slide Image Placeholder 1"/>
-          <p:cNvSpPr>
-            <a:spLocks noGrp="1"/>
-          </p:cNvSpPr>
-          <p:nvPr>
-            <p:ph type="sldImg" idx="2"/>
-          </p:nvPr>
-        </p:nvSpPr>
-        <p:spPr/>
-      </p:sp>
-      <p:sp>
-        <p:nvSpPr>
-          <p:cNvPr id="3" name="Notes Placeholder 2"/>
-          <p:cNvSpPr>
-            <a:spLocks noGrp="1"/>
-          </p:cNvSpPr>
-          <p:nvPr>
-            <p:ph type="body" idx="3" sz="quarter"/>
-          </p:nvPr>
-        </p:nvSpPr>
-        <p:spPr/>
-        <p:txBody>
-          <a:bodyPr/>
-          <a:lstStyle/>
-          <a:p>
-            <a:r>
-              <a:t>Nadie tiene que contestar: solo pensarlo.</a:t>
-            </a:r>
-          </a:p>
-        </p:txBody>
-      </p:sp>
-      <p:sp>
-        <p:nvSpPr>
-          <p:cNvPr id="4" name="Slide Number Placeholder 3"/>
-          <p:cNvSpPr>
-            <a:spLocks noGrp="1"/>
-          </p:cNvSpPr>
-          <p:nvPr>
-            <p:ph type="sldNum" idx="5" sz="quarter"/>
-          </p:nvPr>
-        </p:nvSpPr>
-        <p:spPr/>
-      </p:sp>
-    </p:spTree>
-  </p:cSld>
-  <p:clrMapOvr>
-    <a:masterClrMapping/>
-  </p:clrMapOvr>
-</p:notes>
-</file>
-
-<file path=ppt/notesSlides/notesSlide4.xml><?xml version="1.0" encoding="utf-8"?>
-<p:notes xmlns:a="http://schemas.openxmlformats.org/drawingml/2006/main" xmlns:p="http://schemas.openxmlformats.org/presentationml/2006/main" xmlns:r="http://schemas.openxmlformats.org/officeDocument/2006/relationships">
-  <p:cSld>
-    <p:spTree>
-      <p:nvGrpSpPr>
-        <p:cNvPr id="1" name=""/>
-        <p:cNvGrpSpPr/>
-        <p:nvPr/>
-      </p:nvGrpSpPr>
-      <p:grpSpPr>
-        <a:xfrm>
-          <a:off x="0" y="0"/>
-          <a:ext cx="0" cy="0"/>
-          <a:chOff x="0" y="0"/>
-          <a:chExt cx="0" cy="0"/>
-        </a:xfrm>
-      </p:grpSpPr>
-      <p:sp>
-        <p:nvSpPr>
-          <p:cNvPr id="2" name="Slide Image Placeholder 1"/>
-          <p:cNvSpPr>
-            <a:spLocks noGrp="1"/>
-          </p:cNvSpPr>
-          <p:nvPr>
-            <p:ph type="sldImg" idx="2"/>
-          </p:nvPr>
-        </p:nvSpPr>
-        <p:spPr/>
-      </p:sp>
-      <p:sp>
-        <p:nvSpPr>
-          <p:cNvPr id="3" name="Notes Placeholder 2"/>
-          <p:cNvSpPr>
-            <a:spLocks noGrp="1"/>
-          </p:cNvSpPr>
-          <p:nvPr>
-            <p:ph type="body" idx="3" sz="quarter"/>
-          </p:nvPr>
-        </p:nvSpPr>
-        <p:spPr/>
-        <p:txBody>
-          <a:bodyPr/>
-          <a:lstStyle/>
-          <a:p>
-            <a:r>
-              <a:t>Dejar unos segundos para que piensen la respuesta fácil antes de enseñar los pasos.</a:t>
-            </a:r>
-          </a:p>
-        </p:txBody>
-      </p:sp>
-      <p:sp>
-        <p:nvSpPr>
-          <p:cNvPr id="4" name="Slide Number Placeholder 3"/>
-          <p:cNvSpPr>
-            <a:spLocks noGrp="1"/>
-          </p:cNvSpPr>
-          <p:nvPr>
-            <p:ph type="sldNum" idx="5" sz="quarter"/>
-          </p:nvPr>
-        </p:nvSpPr>
-        <p:spPr/>
-      </p:sp>
-    </p:spTree>
-  </p:cSld>
-  <p:clrMapOvr>
-    <a:masterClrMapping/>
-  </p:clrMapOvr>
-</p:notes>
-</file>
-
-<file path=ppt/notesSlides/notesSlide5.xml><?xml version="1.0" encoding="utf-8"?>
-<p:notes xmlns:a="http://schemas.openxmlformats.org/drawingml/2006/main" xmlns:p="http://schemas.openxmlformats.org/presentationml/2006/main" xmlns:r="http://schemas.openxmlformats.org/officeDocument/2006/relationships">
-  <p:cSld>
-    <p:spTree>
-      <p:nvGrpSpPr>
-        <p:cNvPr id="1" name=""/>
-        <p:cNvGrpSpPr/>
-        <p:nvPr/>
-      </p:nvGrpSpPr>
-      <p:grpSpPr>
-        <a:xfrm>
-          <a:off x="0" y="0"/>
-          <a:ext cx="0" cy="0"/>
-          <a:chOff x="0" y="0"/>
-          <a:chExt cx="0" cy="0"/>
-        </a:xfrm>
-      </p:grpSpPr>
-      <p:sp>
-        <p:nvSpPr>
-          <p:cNvPr id="2" name="Slide Image Placeholder 1"/>
-          <p:cNvSpPr>
-            <a:spLocks noGrp="1"/>
-          </p:cNvSpPr>
-          <p:nvPr>
-            <p:ph type="sldImg" idx="2"/>
-          </p:nvPr>
-        </p:nvSpPr>
-        <p:spPr/>
-      </p:sp>
-      <p:sp>
-        <p:nvSpPr>
-          <p:cNvPr id="3" name="Notes Placeholder 2"/>
-          <p:cNvSpPr>
-            <a:spLocks noGrp="1"/>
-          </p:cNvSpPr>
-          <p:nvPr>
-            <p:ph type="body" idx="3" sz="quarter"/>
-          </p:nvPr>
-        </p:nvSpPr>
-        <p:spPr/>
-        <p:txBody>
-          <a:bodyPr/>
-          <a:lstStyle/>
-          <a:p>
-            <a:r>
-              <a:t>Dejar 2 minutos para que lo escriban. La diapositiva siguiente muestra el resumen.</a:t>
-            </a:r>
-          </a:p>
-        </p:txBody>
-      </p:sp>
-      <p:sp>
-        <p:nvSpPr>
-          <p:cNvPr id="4" name="Slide Number Placeholder 3"/>
-          <p:cNvSpPr>
-            <a:spLocks noGrp="1"/>
-          </p:cNvSpPr>
-          <p:nvPr>
-            <p:ph type="sldNum" idx="5" sz="quarter"/>
-          </p:nvPr>
-        </p:nvSpPr>
-        <p:spPr/>
-      </p:sp>
-    </p:spTree>
-  </p:cSld>
-  <p:clrMapOvr>
-    <a:masterClrMapping/>
-  </p:clrMapOvr>
-</p:notes>
 </file>
 
 <file path=ppt/slideLayouts/slideLayout1.xml><?xml version="1.0" encoding="utf-8"?>

--- a/curso/pptx/S48.pptx
+++ b/curso/pptx/S48.pptx
@@ -3901,7 +3901,7 @@
                 </a:solidFill>
                 <a:latin typeface="Nunito Sans"/>
               </a:rPr>
-              <a:t>Dylan ve un móvil «antes 600 €, ahora 350 €» que anuncia su youtuber favorito. Lee solo opiniones buenas y dice: «Sé mucho de móviles; es la mejor compra». (Inventado.)</a:t>
+              <a:t>Un chico ve un móvil «antes 600 €, ahora 350 €» que anuncia su youtuber favorito. Lee solo opiniones buenas y dice: «Sé mucho de móviles; es la mejor compra». (Inventado.)</a:t>
             </a:r>
           </a:p>
         </p:txBody>
@@ -4210,7 +4210,7 @@
                 </a:solidFill>
                 <a:latin typeface="Nunito Sans"/>
               </a:rPr>
-              <a:t>Naiara quería unas zapatillas desde hace meses. Ve «antes 100 €, ahora 60 €». Ha mirado en tres tiendas: en todas cuestan 100 €.</a:t>
+              <a:t>Una chica quería unas zapatillas desde hace meses. Ve «antes 100 €, ahora 60 €». Ha mirado en tres tiendas: en todas cuestan 100 €.</a:t>
             </a:r>
           </a:p>
         </p:txBody>

--- a/curso/pptx/S48.pptx
+++ b/curso/pptx/S48.pptx
@@ -20,6 +20,8 @@
     <p:sldId id="268" r:id="rId20"/>
     <p:sldId id="269" r:id="rId21"/>
     <p:sldId id="270" r:id="rId22"/>
+    <p:sldId id="271" r:id="rId23"/>
+    <p:sldId id="272" r:id="rId24"/>
   </p:sldIdLst>
   <p:sldSz cx="12192000" cy="6858000" type="screen4x3"/>
   <p:notesSz cx="6858000" cy="9144000"/>
@@ -3572,7 +3574,7 @@
                 </a:solidFill>
                 <a:latin typeface="Fredoka"/>
               </a:rPr>
-              <a:t>Repaso y examen de la unidad 8</a:t>
+              <a:t>Exceso de confianza</a:t>
             </a:r>
           </a:p>
         </p:txBody>
@@ -3611,7 +3613,7 @@
                 </a:solidFill>
                 <a:latin typeface="Nunito Sans"/>
               </a:rPr>
-              <a:t>Repasamos los sesgos: atajos mentales, confirmación, efecto halo, anclaje, encuadre y exceso de confianza.</a:t>
+              <a:t>El exceso de confianza es creer que sabemos o hacemos algo mejor de lo que de verdad lo sabemos o lo hacemos.</a:t>
             </a:r>
           </a:p>
         </p:txBody>
@@ -3630,7 +3632,7 @@
     <p:bg>
       <p:bgPr>
         <a:solidFill>
-          <a:srgbClr val="1F2A44"/>
+          <a:srgbClr val="FBF7EF"/>
         </a:solidFill>
         <a:effectLst/>
       </p:bgPr>
@@ -3650,8 +3652,8 @@
         </p:nvSpPr>
         <p:spPr>
           <a:xfrm>
-            <a:off x="640000" y="2300000"/>
-            <a:ext cx="10912000" cy="500000"/>
+            <a:off x="640000" y="380000"/>
+            <a:ext cx="10912000" cy="420000"/>
           </a:xfrm>
           <a:prstGeom prst="rect">
             <a:avLst/>
@@ -3666,17 +3668,17 @@
           <a:p>
             <a:pPr>
               <a:spcAft>
-                <a:spcPts val="810"/>
-              </a:spcAft>
-            </a:pPr>
-            <a:r>
-              <a:rPr sz="1800" b="1">
-                <a:solidFill>
-                  <a:srgbClr val="F4B183"/>
-                </a:solidFill>
-                <a:latin typeface="Nunito Sans"/>
-              </a:rPr>
-              <a:t>BLOQUE 2</a:t>
+                <a:spcPts val="630"/>
+              </a:spcAft>
+            </a:pPr>
+            <a:r>
+              <a:rPr sz="1400" b="1">
+                <a:solidFill>
+                  <a:srgbClr val="E8793A"/>
+                </a:solidFill>
+                <a:latin typeface="Nunito Sans"/>
+              </a:rPr>
+              <a:t>BLOQUE 2 · CASOS RESUELTOS</a:t>
             </a:r>
           </a:p>
         </p:txBody>
@@ -3689,7 +3691,7 @@
         </p:nvSpPr>
         <p:spPr>
           <a:xfrm>
-            <a:off x="640000" y="2800000"/>
+            <a:off x="640000" y="760000"/>
             <a:ext cx="10912000" cy="800000"/>
           </a:xfrm>
           <a:prstGeom prst="rect">
@@ -3705,17 +3707,222 @@
           <a:p>
             <a:pPr>
               <a:spcAft>
-                <a:spcPts val="2160"/>
-              </a:spcAft>
-            </a:pPr>
-            <a:r>
-              <a:rPr sz="4800" b="1">
-                <a:solidFill>
-                  <a:srgbClr val="FBF7EF"/>
+                <a:spcPts val="1710"/>
+              </a:spcAft>
+            </a:pPr>
+            <a:r>
+              <a:rPr sz="3800" b="1">
+                <a:solidFill>
+                  <a:srgbClr val="1F2A44"/>
                 </a:solidFill>
                 <a:latin typeface="Fredoka"/>
               </a:rPr>
-              <a:t>Casos que lo mezclan todo</a:t>
+              <a:t>Caso 1 · El examen del principio</a:t>
+            </a:r>
+          </a:p>
+        </p:txBody>
+      </p:sp>
+      <p:sp>
+        <p:nvSpPr>
+          <p:cNvPr id="4" name="Rectangle 3"/>
+          <p:cNvSpPr/>
+          <p:nvPr/>
+        </p:nvSpPr>
+        <p:spPr>
+          <a:xfrm>
+            <a:off x="640000" y="1600000"/>
+            <a:ext cx="10912000" cy="1100000"/>
+          </a:xfrm>
+          <a:prstGeom prst="rect">
+            <a:avLst/>
+          </a:prstGeom>
+          <a:solidFill>
+            <a:srgbClr val="FFFFFF"/>
+          </a:solidFill>
+          <a:ln>
+            <a:noFill/>
+          </a:ln>
+        </p:spPr>
+        <p:style>
+          <a:lnRef idx="1">
+            <a:schemeClr val="accent1"/>
+          </a:lnRef>
+          <a:fillRef idx="3">
+            <a:schemeClr val="accent1"/>
+          </a:fillRef>
+          <a:effectRef idx="2">
+            <a:schemeClr val="accent1"/>
+          </a:effectRef>
+          <a:fontRef idx="minor">
+            <a:schemeClr val="lt1"/>
+          </a:fontRef>
+        </p:style>
+        <p:txBody>
+          <a:bodyPr rtlCol="0" anchor="ctr"/>
+          <a:lstStyle/>
+          <a:p>
+            <a:pPr algn="ctr"/>
+          </a:p>
+        </p:txBody>
+      </p:sp>
+      <p:sp>
+        <p:nvSpPr>
+          <p:cNvPr id="5" name="TextBox 4"/>
+          <p:cNvSpPr txBox="1"/>
+          <p:nvPr/>
+        </p:nvSpPr>
+        <p:spPr>
+          <a:xfrm>
+            <a:off x="840000" y="1650000"/>
+            <a:ext cx="10512000" cy="1000000"/>
+          </a:xfrm>
+          <a:prstGeom prst="rect">
+            <a:avLst/>
+          </a:prstGeom>
+          <a:noFill/>
+        </p:spPr>
+        <p:txBody>
+          <a:bodyPr wrap="square" anchor="ctr">
+            <a:spAutoFit/>
+          </a:bodyPr>
+          <a:lstStyle/>
+          <a:p>
+            <a:pPr>
+              <a:spcAft>
+                <a:spcPts val="1170"/>
+              </a:spcAft>
+            </a:pPr>
+            <a:r>
+              <a:rPr sz="2600" b="1">
+                <a:solidFill>
+                  <a:srgbClr val="1F2A44"/>
+                </a:solidFill>
+                <a:latin typeface="Nunito Sans"/>
+              </a:rPr>
+              <a:t>Un chico: «El examen de mañana me lo sé. Lo he leído una vez y lo entiendo todo».</a:t>
+            </a:r>
+          </a:p>
+        </p:txBody>
+      </p:sp>
+      <p:sp>
+        <p:nvSpPr>
+          <p:cNvPr id="6" name="TextBox 5"/>
+          <p:cNvSpPr txBox="1"/>
+          <p:nvPr/>
+        </p:nvSpPr>
+        <p:spPr>
+          <a:xfrm>
+            <a:off x="640000" y="2900000"/>
+            <a:ext cx="10912000" cy="3500000"/>
+          </a:xfrm>
+          <a:prstGeom prst="rect">
+            <a:avLst/>
+          </a:prstGeom>
+          <a:noFill/>
+        </p:spPr>
+        <p:txBody>
+          <a:bodyPr wrap="square">
+            <a:spAutoFit/>
+          </a:bodyPr>
+          <a:lstStyle/>
+          <a:p>
+            <a:pPr>
+              <a:spcAft>
+                <a:spcPts val="1080"/>
+              </a:spcAft>
+            </a:pPr>
+            <a:r>
+              <a:rPr sz="2400" b="1">
+                <a:solidFill>
+                  <a:srgbClr val="E8793A"/>
+                </a:solidFill>
+                <a:latin typeface="Nunito Sans"/>
+              </a:rPr>
+              <a:t>1. </a:t>
+            </a:r>
+            <a:r>
+              <a:rPr sz="2400" b="0">
+                <a:solidFill>
+                  <a:srgbClr val="1F2A44"/>
+                </a:solidFill>
+                <a:latin typeface="Nunito Sans"/>
+              </a:rPr>
+              <a:t>Leer una vez da la sensación de «me suena». No es lo mismo que saberlo.</a:t>
+            </a:r>
+          </a:p>
+          <a:p>
+            <a:pPr>
+              <a:spcAft>
+                <a:spcPts val="1080"/>
+              </a:spcAft>
+            </a:pPr>
+            <a:r>
+              <a:rPr sz="2400" b="1">
+                <a:solidFill>
+                  <a:srgbClr val="E8793A"/>
+                </a:solidFill>
+                <a:latin typeface="Nunito Sans"/>
+              </a:rPr>
+              <a:t>2. </a:t>
+            </a:r>
+            <a:r>
+              <a:rPr sz="2400" b="0">
+                <a:solidFill>
+                  <a:srgbClr val="1F2A44"/>
+                </a:solidFill>
+                <a:latin typeface="Nunito Sans"/>
+              </a:rPr>
+              <a:t>La prueba: cerrar el libro y explicarlo sin mirar.</a:t>
+            </a:r>
+          </a:p>
+          <a:p>
+            <a:pPr>
+              <a:spcAft>
+                <a:spcPts val="1080"/>
+              </a:spcAft>
+            </a:pPr>
+            <a:r>
+              <a:rPr sz="2400" b="1">
+                <a:solidFill>
+                  <a:srgbClr val="E8793A"/>
+                </a:solidFill>
+                <a:latin typeface="Nunito Sans"/>
+              </a:rPr>
+              <a:t>3. </a:t>
+            </a:r>
+            <a:r>
+              <a:rPr sz="2400" b="0">
+                <a:solidFill>
+                  <a:srgbClr val="1F2A44"/>
+                </a:solidFill>
+                <a:latin typeface="Nunito Sans"/>
+              </a:rPr>
+              <a:t>Si no puede explicarlo, su confianza era mayor que lo que sabía.</a:t>
+            </a:r>
+          </a:p>
+          <a:p>
+            <a:pPr>
+              <a:spcAft>
+                <a:spcPts val="1080"/>
+              </a:spcAft>
+            </a:pPr>
+            <a:r>
+              <a:rPr sz="2400" b="1">
+                <a:solidFill>
+                  <a:srgbClr val="E8793A"/>
+                </a:solidFill>
+                <a:latin typeface="Nunito Sans"/>
+              </a:rPr>
+              <a:t>4. </a:t>
+            </a:r>
+            <a:r>
+              <a:rPr sz="2400" b="0">
+                <a:solidFill>
+                  <a:srgbClr val="1F2A44"/>
+                </a:solidFill>
+                <a:latin typeface="Nunito Sans"/>
+              </a:rPr>
+              <a:t>Conclusión: la mejor medicina contra el exceso de confianza es ponerse a prueba.</a:t>
             </a:r>
           </a:p>
         </p:txBody>
@@ -3780,7 +3987,7 @@
                 </a:solidFill>
                 <a:latin typeface="Nunito Sans"/>
               </a:rPr>
-              <a:t>BLOQUE 2 · CASOS QUE LO MEZCLAN TODO</a:t>
+              <a:t>BLOQUE 2 · CASOS RESUELTOS</a:t>
             </a:r>
           </a:p>
         </p:txBody>
@@ -3819,7 +4026,7 @@
                 </a:solidFill>
                 <a:latin typeface="Fredoka"/>
               </a:rPr>
-              <a:t>Caso · La compra del móvil</a:t>
+              <a:t>Caso 2 · ¿Cómo funciona una cremallera?</a:t>
             </a:r>
           </a:p>
         </p:txBody>
@@ -3901,7 +4108,7 @@
                 </a:solidFill>
                 <a:latin typeface="Nunito Sans"/>
               </a:rPr>
-              <a:t>Un chico ve un móvil «antes 600 €, ahora 350 €» que anuncia su youtuber favorito. Lee solo opiniones buenas y dice: «Sé mucho de móviles; es la mejor compra». (Inventado.)</a:t>
+              <a:t>Estudio de Rozenblit y Keil (2002). Preguntaban a la gente si entendía cómo funciona una cremallera. Luego le pedían explicarlo paso a paso.</a:t>
             </a:r>
           </a:p>
         </p:txBody>
@@ -3949,7 +4156,7 @@
                 </a:solidFill>
                 <a:latin typeface="Nunito Sans"/>
               </a:rPr>
-              <a:t>Anclaje: «antes 600 €» hace que 350 € parezca barato.</a:t>
+              <a:t>Antes de explicarlo, mucha gente se daba una nota bastante alta.</a:t>
             </a:r>
           </a:p>
           <a:p>
@@ -3974,7 +4181,7 @@
                 </a:solidFill>
                 <a:latin typeface="Nunito Sans"/>
               </a:rPr>
-              <a:t>Halo: le cae bien el youtuber, así que se fía del móvil.</a:t>
+              <a:t>Al intentar explicarlo paso a paso, se atascaba.</a:t>
             </a:r>
           </a:p>
           <a:p>
@@ -3999,7 +4206,7 @@
                 </a:solidFill>
                 <a:latin typeface="Nunito Sans"/>
               </a:rPr>
-              <a:t>Confirmación: solo lee opiniones buenas. Exceso de confianza: «sé mucho de móviles».</a:t>
+              <a:t>Después, ellos mismos bajaban su nota.</a:t>
             </a:r>
           </a:p>
           <a:p>
@@ -4024,7 +4231,7 @@
                 </a:solidFill>
                 <a:latin typeface="Nunito Sans"/>
               </a:rPr>
-              <a:t>Conclusión: cuatro sesgos a la vez. Frena, compara precios y lee también las opiniones malas.</a:t>
+              <a:t>Conclusión: creemos entender cosas que solo conocemos «de vista». Explicarlas nos pone a prueba.</a:t>
             </a:r>
           </a:p>
         </p:txBody>
@@ -4038,6 +4245,315 @@
 </file>
 
 <file path=ppt/slides/slide12.xml><?xml version="1.0" encoding="utf-8"?>
+<p:sld xmlns:a="http://schemas.openxmlformats.org/drawingml/2006/main" xmlns:p="http://schemas.openxmlformats.org/presentationml/2006/main" xmlns:r="http://schemas.openxmlformats.org/officeDocument/2006/relationships">
+  <p:cSld>
+    <p:bg>
+      <p:bgPr>
+        <a:solidFill>
+          <a:srgbClr val="FBF7EF"/>
+        </a:solidFill>
+        <a:effectLst/>
+      </p:bgPr>
+    </p:bg>
+    <p:spTree>
+      <p:nvGrpSpPr>
+        <p:cNvPr id="1" name=""/>
+        <p:cNvGrpSpPr/>
+        <p:nvPr/>
+      </p:nvGrpSpPr>
+      <p:grpSpPr/>
+      <p:sp>
+        <p:nvSpPr>
+          <p:cNvPr id="2" name="TextBox 1"/>
+          <p:cNvSpPr txBox="1"/>
+          <p:nvPr/>
+        </p:nvSpPr>
+        <p:spPr>
+          <a:xfrm>
+            <a:off x="640000" y="380000"/>
+            <a:ext cx="10912000" cy="420000"/>
+          </a:xfrm>
+          <a:prstGeom prst="rect">
+            <a:avLst/>
+          </a:prstGeom>
+          <a:noFill/>
+        </p:spPr>
+        <p:txBody>
+          <a:bodyPr wrap="square">
+            <a:spAutoFit/>
+          </a:bodyPr>
+          <a:lstStyle/>
+          <a:p>
+            <a:pPr>
+              <a:spcAft>
+                <a:spcPts val="630"/>
+              </a:spcAft>
+            </a:pPr>
+            <a:r>
+              <a:rPr sz="1400" b="1">
+                <a:solidFill>
+                  <a:srgbClr val="E8793A"/>
+                </a:solidFill>
+                <a:latin typeface="Nunito Sans"/>
+              </a:rPr>
+              <a:t>BLOQUE 2 · CASOS RESUELTOS</a:t>
+            </a:r>
+          </a:p>
+        </p:txBody>
+      </p:sp>
+      <p:sp>
+        <p:nvSpPr>
+          <p:cNvPr id="3" name="TextBox 2"/>
+          <p:cNvSpPr txBox="1"/>
+          <p:nvPr/>
+        </p:nvSpPr>
+        <p:spPr>
+          <a:xfrm>
+            <a:off x="640000" y="760000"/>
+            <a:ext cx="10912000" cy="800000"/>
+          </a:xfrm>
+          <a:prstGeom prst="rect">
+            <a:avLst/>
+          </a:prstGeom>
+          <a:noFill/>
+        </p:spPr>
+        <p:txBody>
+          <a:bodyPr wrap="square">
+            <a:spAutoFit/>
+          </a:bodyPr>
+          <a:lstStyle/>
+          <a:p>
+            <a:pPr>
+              <a:spcAft>
+                <a:spcPts val="1710"/>
+              </a:spcAft>
+            </a:pPr>
+            <a:r>
+              <a:rPr sz="3800" b="1">
+                <a:solidFill>
+                  <a:srgbClr val="1F2A44"/>
+                </a:solidFill>
+                <a:latin typeface="Fredoka"/>
+              </a:rPr>
+              <a:t>Caso 3 · El trabajo de Historia</a:t>
+            </a:r>
+          </a:p>
+        </p:txBody>
+      </p:sp>
+      <p:sp>
+        <p:nvSpPr>
+          <p:cNvPr id="4" name="Rectangle 3"/>
+          <p:cNvSpPr/>
+          <p:nvPr/>
+        </p:nvSpPr>
+        <p:spPr>
+          <a:xfrm>
+            <a:off x="640000" y="1600000"/>
+            <a:ext cx="10912000" cy="1100000"/>
+          </a:xfrm>
+          <a:prstGeom prst="rect">
+            <a:avLst/>
+          </a:prstGeom>
+          <a:solidFill>
+            <a:srgbClr val="FFFFFF"/>
+          </a:solidFill>
+          <a:ln>
+            <a:noFill/>
+          </a:ln>
+        </p:spPr>
+        <p:style>
+          <a:lnRef idx="1">
+            <a:schemeClr val="accent1"/>
+          </a:lnRef>
+          <a:fillRef idx="3">
+            <a:schemeClr val="accent1"/>
+          </a:fillRef>
+          <a:effectRef idx="2">
+            <a:schemeClr val="accent1"/>
+          </a:effectRef>
+          <a:fontRef idx="minor">
+            <a:schemeClr val="lt1"/>
+          </a:fontRef>
+        </p:style>
+        <p:txBody>
+          <a:bodyPr rtlCol="0" anchor="ctr"/>
+          <a:lstStyle/>
+          <a:p>
+            <a:pPr algn="ctr"/>
+          </a:p>
+        </p:txBody>
+      </p:sp>
+      <p:sp>
+        <p:nvSpPr>
+          <p:cNvPr id="5" name="TextBox 4"/>
+          <p:cNvSpPr txBox="1"/>
+          <p:nvPr/>
+        </p:nvSpPr>
+        <p:spPr>
+          <a:xfrm>
+            <a:off x="840000" y="1650000"/>
+            <a:ext cx="10512000" cy="1000000"/>
+          </a:xfrm>
+          <a:prstGeom prst="rect">
+            <a:avLst/>
+          </a:prstGeom>
+          <a:noFill/>
+        </p:spPr>
+        <p:txBody>
+          <a:bodyPr wrap="square" anchor="ctr">
+            <a:spAutoFit/>
+          </a:bodyPr>
+          <a:lstStyle/>
+          <a:p>
+            <a:pPr>
+              <a:spcAft>
+                <a:spcPts val="1170"/>
+              </a:spcAft>
+            </a:pPr>
+            <a:r>
+              <a:rPr sz="2600" b="1">
+                <a:solidFill>
+                  <a:srgbClr val="1F2A44"/>
+                </a:solidFill>
+                <a:latin typeface="Nunito Sans"/>
+              </a:rPr>
+              <a:t>Un chico: «El trabajo lo hago el domingo por la tarde, en dos horas». Siempre dice lo mismo, y siempre acaba de noche.</a:t>
+            </a:r>
+          </a:p>
+        </p:txBody>
+      </p:sp>
+      <p:sp>
+        <p:nvSpPr>
+          <p:cNvPr id="6" name="TextBox 5"/>
+          <p:cNvSpPr txBox="1"/>
+          <p:nvPr/>
+        </p:nvSpPr>
+        <p:spPr>
+          <a:xfrm>
+            <a:off x="640000" y="2900000"/>
+            <a:ext cx="10912000" cy="3500000"/>
+          </a:xfrm>
+          <a:prstGeom prst="rect">
+            <a:avLst/>
+          </a:prstGeom>
+          <a:noFill/>
+        </p:spPr>
+        <p:txBody>
+          <a:bodyPr wrap="square">
+            <a:spAutoFit/>
+          </a:bodyPr>
+          <a:lstStyle/>
+          <a:p>
+            <a:pPr>
+              <a:spcAft>
+                <a:spcPts val="1080"/>
+              </a:spcAft>
+            </a:pPr>
+            <a:r>
+              <a:rPr sz="2400" b="1">
+                <a:solidFill>
+                  <a:srgbClr val="E8793A"/>
+                </a:solidFill>
+                <a:latin typeface="Nunito Sans"/>
+              </a:rPr>
+              <a:t>1. </a:t>
+            </a:r>
+            <a:r>
+              <a:rPr sz="2400" b="0">
+                <a:solidFill>
+                  <a:srgbClr val="1F2A44"/>
+                </a:solidFill>
+                <a:latin typeface="Nunito Sans"/>
+              </a:rPr>
+              <a:t>Ese chico planea como si todo fuera a salir perfecto.</a:t>
+            </a:r>
+          </a:p>
+          <a:p>
+            <a:pPr>
+              <a:spcAft>
+                <a:spcPts val="1080"/>
+              </a:spcAft>
+            </a:pPr>
+            <a:r>
+              <a:rPr sz="2400" b="1">
+                <a:solidFill>
+                  <a:srgbClr val="E8793A"/>
+                </a:solidFill>
+                <a:latin typeface="Nunito Sans"/>
+              </a:rPr>
+              <a:t>2. </a:t>
+            </a:r>
+            <a:r>
+              <a:rPr sz="2400" b="0">
+                <a:solidFill>
+                  <a:srgbClr val="1F2A44"/>
+                </a:solidFill>
+                <a:latin typeface="Nunito Sans"/>
+              </a:rPr>
+              <a:t>No cuenta con imprevistos: buscar información, un fallo del ordenador, cansarse.</a:t>
+            </a:r>
+          </a:p>
+          <a:p>
+            <a:pPr>
+              <a:spcAft>
+                <a:spcPts val="1080"/>
+              </a:spcAft>
+            </a:pPr>
+            <a:r>
+              <a:rPr sz="2400" b="1">
+                <a:solidFill>
+                  <a:srgbClr val="E8793A"/>
+                </a:solidFill>
+                <a:latin typeface="Nunito Sans"/>
+              </a:rPr>
+              <a:t>3. </a:t>
+            </a:r>
+            <a:r>
+              <a:rPr sz="2400" b="0">
+                <a:solidFill>
+                  <a:srgbClr val="1F2A44"/>
+                </a:solidFill>
+                <a:latin typeface="Nunito Sans"/>
+              </a:rPr>
+              <a:t>Sabe que otras veces tardó más, pero no lo tiene en cuenta.</a:t>
+            </a:r>
+          </a:p>
+          <a:p>
+            <a:pPr>
+              <a:spcAft>
+                <a:spcPts val="1080"/>
+              </a:spcAft>
+            </a:pPr>
+            <a:r>
+              <a:rPr sz="2400" b="1">
+                <a:solidFill>
+                  <a:srgbClr val="E8793A"/>
+                </a:solidFill>
+                <a:latin typeface="Nunito Sans"/>
+              </a:rPr>
+              <a:t>4. </a:t>
+            </a:r>
+            <a:r>
+              <a:rPr sz="2400" b="0">
+                <a:solidFill>
+                  <a:srgbClr val="1F2A44"/>
+                </a:solidFill>
+                <a:latin typeface="Nunito Sans"/>
+              </a:rPr>
+              <a:t>Conclusión: exceso de confianza al planear. Mira cuánto tardaste otras veces y añade margen.</a:t>
+            </a:r>
+          </a:p>
+        </p:txBody>
+      </p:sp>
+    </p:spTree>
+  </p:cSld>
+  <p:clrMapOvr>
+    <a:masterClrMapping/>
+  </p:clrMapOvr>
+</p:sld>
+</file>
+
+<file path=ppt/slides/slide13.xml><?xml version="1.0" encoding="utf-8"?>
 <p:sld xmlns:a="http://schemas.openxmlformats.org/drawingml/2006/main" xmlns:p="http://schemas.openxmlformats.org/presentationml/2006/main" xmlns:r="http://schemas.openxmlformats.org/officeDocument/2006/relationships">
   <p:cSld>
     <p:bg>
@@ -4089,7 +4605,7 @@
                 </a:solidFill>
                 <a:latin typeface="Nunito Sans"/>
               </a:rPr>
-              <a:t>CASO TRAMPA · BLOQUE 2 · CASOS QUE LO MEZCLAN TODO</a:t>
+              <a:t>CASO TRAMPA · BLOQUE 2 · CASOS RESUELTOS</a:t>
             </a:r>
           </a:p>
         </p:txBody>
@@ -4128,7 +4644,7 @@
                 </a:solidFill>
                 <a:latin typeface="Fredoka"/>
               </a:rPr>
-              <a:t>⚠ ¿Todo es un sesgo?</a:t>
+              <a:t>⚠ ¿Seguro de más?</a:t>
             </a:r>
           </a:p>
         </p:txBody>
@@ -4210,7 +4726,7 @@
                 </a:solidFill>
                 <a:latin typeface="Nunito Sans"/>
               </a:rPr>
-              <a:t>Una chica quería unas zapatillas desde hace meses. Ve «antes 100 €, ahora 60 €». Ha mirado en tres tiendas: en todas cuestan 100 €.</a:t>
+              <a:t>Un chico es portero federado desde hace tres años. Dice: «En los penaltis del recreo paro más que nadie de la clase». Lo demuestra cada semana.</a:t>
             </a:r>
           </a:p>
         </p:txBody>
@@ -4258,7 +4774,7 @@
                 </a:solidFill>
                 <a:latin typeface="Nunito Sans"/>
               </a:rPr>
-              <a:t>Hay un «antes» y un «ahora»… ¿ha caído en el anclaje?</a:t>
+              <a:t>Está muy seguro de ser mejor que la mayoría… ¿exceso de confianza?</a:t>
             </a:r>
           </a:p>
           <a:p>
@@ -4283,7 +4799,7 @@
                 </a:solidFill>
                 <a:latin typeface="Nunito Sans"/>
               </a:rPr>
-              <a:t>Parece anclaje: el «antes 100 €» hace que 60 € parezca barato.</a:t>
+              <a:t>Parece que sí: «soy mejor que la mayoría» es la frase típica.</a:t>
             </a:r>
           </a:p>
           <a:p>
@@ -4308,7 +4824,7 @@
                 </a:solidFill>
                 <a:latin typeface="Nunito Sans"/>
               </a:rPr>
-              <a:t>Pero ha comprobado el precio real en otras tiendas: la rebaja es de verdad.</a:t>
+              <a:t>Pero miro las pruebas: entrena, y lo ha demostrado muchas veces delante de todos.</a:t>
             </a:r>
           </a:p>
           <a:p>
@@ -4333,7 +4849,7 @@
                 </a:solidFill>
                 <a:latin typeface="Nunito Sans"/>
               </a:rPr>
-              <a:t>Y no compra por la oferta: las quería desde hace meses.</a:t>
+              <a:t>El exceso de confianza es estar más seguro de lo que dicen las pruebas. Aquí las pruebas le dan la razón.</a:t>
             </a:r>
           </a:p>
           <a:p>
@@ -4358,150 +4874,7 @@
                 </a:solidFill>
                 <a:latin typeface="Nunito Sans"/>
               </a:rPr>
-              <a:t>Conclusión: ver una técnica no basta para decir que hay sesgo. La pregunta es: ¿he pensado con razones?</a:t>
-            </a:r>
-          </a:p>
-        </p:txBody>
-      </p:sp>
-    </p:spTree>
-  </p:cSld>
-  <p:clrMapOvr>
-    <a:masterClrMapping/>
-  </p:clrMapOvr>
-</p:sld>
-</file>
-
-<file path=ppt/slides/slide13.xml><?xml version="1.0" encoding="utf-8"?>
-<p:sld xmlns:a="http://schemas.openxmlformats.org/drawingml/2006/main" xmlns:p="http://schemas.openxmlformats.org/presentationml/2006/main" xmlns:r="http://schemas.openxmlformats.org/officeDocument/2006/relationships">
-  <p:cSld>
-    <p:bg>
-      <p:bgPr>
-        <a:solidFill>
-          <a:srgbClr val="FBF7EF"/>
-        </a:solidFill>
-        <a:effectLst/>
-      </p:bgPr>
-    </p:bg>
-    <p:spTree>
-      <p:nvGrpSpPr>
-        <p:cNvPr id="1" name=""/>
-        <p:cNvGrpSpPr/>
-        <p:nvPr/>
-      </p:nvGrpSpPr>
-      <p:grpSpPr/>
-      <p:sp>
-        <p:nvSpPr>
-          <p:cNvPr id="2" name="TextBox 1"/>
-          <p:cNvSpPr txBox="1"/>
-          <p:nvPr/>
-        </p:nvSpPr>
-        <p:spPr>
-          <a:xfrm>
-            <a:off x="640000" y="380000"/>
-            <a:ext cx="10912000" cy="420000"/>
-          </a:xfrm>
-          <a:prstGeom prst="rect">
-            <a:avLst/>
-          </a:prstGeom>
-          <a:noFill/>
-        </p:spPr>
-        <p:txBody>
-          <a:bodyPr wrap="square">
-            <a:spAutoFit/>
-          </a:bodyPr>
-          <a:lstStyle/>
-          <a:p>
-            <a:pPr>
-              <a:spcAft>
-                <a:spcPts val="630"/>
-              </a:spcAft>
-            </a:pPr>
-            <a:r>
-              <a:rPr sz="1400" b="1">
-                <a:solidFill>
-                  <a:srgbClr val="E8793A"/>
-                </a:solidFill>
-                <a:latin typeface="Nunito Sans"/>
-              </a:rPr>
-              <a:t>LO DE HOY EN TRES LÍNEAS</a:t>
-            </a:r>
-          </a:p>
-        </p:txBody>
-      </p:sp>
-      <p:sp>
-        <p:nvSpPr>
-          <p:cNvPr id="3" name="TextBox 2"/>
-          <p:cNvSpPr txBox="1"/>
-          <p:nvPr/>
-        </p:nvSpPr>
-        <p:spPr>
-          <a:xfrm>
-            <a:off x="640000" y="760000"/>
-            <a:ext cx="10912000" cy="800000"/>
-          </a:xfrm>
-          <a:prstGeom prst="rect">
-            <a:avLst/>
-          </a:prstGeom>
-          <a:noFill/>
-        </p:spPr>
-        <p:txBody>
-          <a:bodyPr wrap="square">
-            <a:spAutoFit/>
-          </a:bodyPr>
-          <a:lstStyle/>
-          <a:p>
-            <a:pPr>
-              <a:spcAft>
-                <a:spcPts val="1710"/>
-              </a:spcAft>
-            </a:pPr>
-            <a:r>
-              <a:rPr sz="3800" b="1">
-                <a:solidFill>
-                  <a:srgbClr val="1F2A44"/>
-                </a:solidFill>
-                <a:latin typeface="Fredoka"/>
-              </a:rPr>
-              <a:t>Escríbelo tú primero, sin mirar</a:t>
-            </a:r>
-          </a:p>
-        </p:txBody>
-      </p:sp>
-      <p:sp>
-        <p:nvSpPr>
-          <p:cNvPr id="4" name="TextBox 3"/>
-          <p:cNvSpPr txBox="1"/>
-          <p:nvPr/>
-        </p:nvSpPr>
-        <p:spPr>
-          <a:xfrm>
-            <a:off x="640000" y="1800000"/>
-            <a:ext cx="10912000" cy="1500000"/>
-          </a:xfrm>
-          <a:prstGeom prst="rect">
-            <a:avLst/>
-          </a:prstGeom>
-          <a:noFill/>
-        </p:spPr>
-        <p:txBody>
-          <a:bodyPr wrap="square">
-            <a:spAutoFit/>
-          </a:bodyPr>
-          <a:lstStyle/>
-          <a:p>
-            <a:pPr>
-              <a:spcAft>
-                <a:spcPts val="1170"/>
-              </a:spcAft>
-            </a:pPr>
-            <a:r>
-              <a:rPr sz="2600" b="0">
-                <a:solidFill>
-                  <a:srgbClr val="4A5568"/>
-                </a:solidFill>
-                <a:latin typeface="Nunito Sans"/>
-              </a:rPr>
-              <a:t>Dos minutos. Después lo comparamos.</a:t>
+              <a:t>Conclusión: estar seguro con pruebas no es un sesgo. Y también se falla al revés: creer que sabes menos.</a:t>
             </a:r>
           </a:p>
         </p:txBody>
@@ -4579,8 +4952,8 @@
         </p:nvSpPr>
         <p:spPr>
           <a:xfrm>
-            <a:off x="640000" y="1300000"/>
-            <a:ext cx="10912000" cy="4800000"/>
+            <a:off x="640000" y="760000"/>
+            <a:ext cx="10912000" cy="800000"/>
           </a:xfrm>
           <a:prstGeom prst="rect">
             <a:avLst/>
@@ -4595,76 +4968,56 @@
           <a:p>
             <a:pPr>
               <a:spcAft>
-                <a:spcPts val="1350"/>
-              </a:spcAft>
-            </a:pPr>
-            <a:r>
-              <a:rPr sz="3000" b="1">
-                <a:solidFill>
-                  <a:srgbClr val="E8793A"/>
-                </a:solidFill>
-                <a:latin typeface="Nunito Sans"/>
-              </a:rPr>
-              <a:t>1. </a:t>
-            </a:r>
-            <a:r>
-              <a:rPr sz="3000" b="0">
+                <a:spcPts val="1710"/>
+              </a:spcAft>
+            </a:pPr>
+            <a:r>
+              <a:rPr sz="3800" b="1">
                 <a:solidFill>
                   <a:srgbClr val="1F2A44"/>
                 </a:solidFill>
-                <a:latin typeface="Nunito Sans"/>
-              </a:rPr>
-              <a:t>Los sesgos son errores que se repiten de forma predecible; suelen venir de atajos útiles.</a:t>
-            </a:r>
-          </a:p>
-          <a:p>
-            <a:pPr>
-              <a:spcAft>
-                <a:spcPts val="1350"/>
-              </a:spcAft>
-            </a:pPr>
-            <a:r>
-              <a:rPr sz="3000" b="1">
-                <a:solidFill>
-                  <a:srgbClr val="E8793A"/>
-                </a:solidFill>
-                <a:latin typeface="Nunito Sans"/>
-              </a:rPr>
-              <a:t>2. </a:t>
-            </a:r>
-            <a:r>
-              <a:rPr sz="3000" b="0">
-                <a:solidFill>
-                  <a:srgbClr val="1F2A44"/>
-                </a:solidFill>
-                <a:latin typeface="Nunito Sans"/>
-              </a:rPr>
-              <a:t>Confirmación, halo, anclaje, encuadre y exceso de confianza nos pasan a todos.</a:t>
-            </a:r>
-          </a:p>
-          <a:p>
-            <a:pPr>
-              <a:spcAft>
-                <a:spcPts val="1350"/>
-              </a:spcAft>
-            </a:pPr>
-            <a:r>
-              <a:rPr sz="3000" b="1">
-                <a:solidFill>
-                  <a:srgbClr val="E8793A"/>
-                </a:solidFill>
-                <a:latin typeface="Nunito Sans"/>
-              </a:rPr>
-              <a:t>3. </a:t>
-            </a:r>
-            <a:r>
-              <a:rPr sz="3000" b="0">
-                <a:solidFill>
-                  <a:srgbClr val="1F2A44"/>
-                </a:solidFill>
-                <a:latin typeface="Nunito Sans"/>
-              </a:rPr>
-              <a:t>Para frenarlos: pensar despacio, buscar lo contrario y ponerse a prueba.</a:t>
+                <a:latin typeface="Fredoka"/>
+              </a:rPr>
+              <a:t>Escríbelo tú primero, sin mirar</a:t>
+            </a:r>
+          </a:p>
+        </p:txBody>
+      </p:sp>
+      <p:sp>
+        <p:nvSpPr>
+          <p:cNvPr id="4" name="TextBox 3"/>
+          <p:cNvSpPr txBox="1"/>
+          <p:nvPr/>
+        </p:nvSpPr>
+        <p:spPr>
+          <a:xfrm>
+            <a:off x="640000" y="1800000"/>
+            <a:ext cx="10912000" cy="1500000"/>
+          </a:xfrm>
+          <a:prstGeom prst="rect">
+            <a:avLst/>
+          </a:prstGeom>
+          <a:noFill/>
+        </p:spPr>
+        <p:txBody>
+          <a:bodyPr wrap="square">
+            <a:spAutoFit/>
+          </a:bodyPr>
+          <a:lstStyle/>
+          <a:p>
+            <a:pPr>
+              <a:spcAft>
+                <a:spcPts val="1170"/>
+              </a:spcAft>
+            </a:pPr>
+            <a:r>
+              <a:rPr sz="2600" b="0">
+                <a:solidFill>
+                  <a:srgbClr val="4A5568"/>
+                </a:solidFill>
+                <a:latin typeface="Nunito Sans"/>
+              </a:rPr>
+              <a:t>Dos minutos. Después lo comparamos.</a:t>
             </a:r>
           </a:p>
         </p:txBody>
@@ -4678,6 +5031,169 @@
 </file>
 
 <file path=ppt/slides/slide15.xml><?xml version="1.0" encoding="utf-8"?>
+<p:sld xmlns:a="http://schemas.openxmlformats.org/drawingml/2006/main" xmlns:p="http://schemas.openxmlformats.org/presentationml/2006/main" xmlns:r="http://schemas.openxmlformats.org/officeDocument/2006/relationships">
+  <p:cSld>
+    <p:bg>
+      <p:bgPr>
+        <a:solidFill>
+          <a:srgbClr val="FBF7EF"/>
+        </a:solidFill>
+        <a:effectLst/>
+      </p:bgPr>
+    </p:bg>
+    <p:spTree>
+      <p:nvGrpSpPr>
+        <p:cNvPr id="1" name=""/>
+        <p:cNvGrpSpPr/>
+        <p:nvPr/>
+      </p:nvGrpSpPr>
+      <p:grpSpPr/>
+      <p:sp>
+        <p:nvSpPr>
+          <p:cNvPr id="2" name="TextBox 1"/>
+          <p:cNvSpPr txBox="1"/>
+          <p:nvPr/>
+        </p:nvSpPr>
+        <p:spPr>
+          <a:xfrm>
+            <a:off x="640000" y="380000"/>
+            <a:ext cx="10912000" cy="420000"/>
+          </a:xfrm>
+          <a:prstGeom prst="rect">
+            <a:avLst/>
+          </a:prstGeom>
+          <a:noFill/>
+        </p:spPr>
+        <p:txBody>
+          <a:bodyPr wrap="square">
+            <a:spAutoFit/>
+          </a:bodyPr>
+          <a:lstStyle/>
+          <a:p>
+            <a:pPr>
+              <a:spcAft>
+                <a:spcPts val="630"/>
+              </a:spcAft>
+            </a:pPr>
+            <a:r>
+              <a:rPr sz="1400" b="1">
+                <a:solidFill>
+                  <a:srgbClr val="E8793A"/>
+                </a:solidFill>
+                <a:latin typeface="Nunito Sans"/>
+              </a:rPr>
+              <a:t>LO DE HOY EN TRES LÍNEAS</a:t>
+            </a:r>
+          </a:p>
+        </p:txBody>
+      </p:sp>
+      <p:sp>
+        <p:nvSpPr>
+          <p:cNvPr id="3" name="TextBox 2"/>
+          <p:cNvSpPr txBox="1"/>
+          <p:nvPr/>
+        </p:nvSpPr>
+        <p:spPr>
+          <a:xfrm>
+            <a:off x="640000" y="1300000"/>
+            <a:ext cx="10912000" cy="4800000"/>
+          </a:xfrm>
+          <a:prstGeom prst="rect">
+            <a:avLst/>
+          </a:prstGeom>
+          <a:noFill/>
+        </p:spPr>
+        <p:txBody>
+          <a:bodyPr wrap="square">
+            <a:spAutoFit/>
+          </a:bodyPr>
+          <a:lstStyle/>
+          <a:p>
+            <a:pPr>
+              <a:spcAft>
+                <a:spcPts val="1350"/>
+              </a:spcAft>
+            </a:pPr>
+            <a:r>
+              <a:rPr sz="3000" b="1">
+                <a:solidFill>
+                  <a:srgbClr val="E8793A"/>
+                </a:solidFill>
+                <a:latin typeface="Nunito Sans"/>
+              </a:rPr>
+              <a:t>1. </a:t>
+            </a:r>
+            <a:r>
+              <a:rPr sz="3000" b="0">
+                <a:solidFill>
+                  <a:srgbClr val="1F2A44"/>
+                </a:solidFill>
+                <a:latin typeface="Nunito Sans"/>
+              </a:rPr>
+              <a:t>El exceso de confianza es creer que sabemos más de lo que sabemos.</a:t>
+            </a:r>
+          </a:p>
+          <a:p>
+            <a:pPr>
+              <a:spcAft>
+                <a:spcPts val="1350"/>
+              </a:spcAft>
+            </a:pPr>
+            <a:r>
+              <a:rPr sz="3000" b="1">
+                <a:solidFill>
+                  <a:srgbClr val="E8793A"/>
+                </a:solidFill>
+                <a:latin typeface="Nunito Sans"/>
+              </a:rPr>
+              <a:t>2. </a:t>
+            </a:r>
+            <a:r>
+              <a:rPr sz="3000" b="0">
+                <a:solidFill>
+                  <a:srgbClr val="1F2A44"/>
+                </a:solidFill>
+                <a:latin typeface="Nunito Sans"/>
+              </a:rPr>
+              <a:t>Quien sabe poco de algo a menudo no ve sus propios errores.</a:t>
+            </a:r>
+          </a:p>
+          <a:p>
+            <a:pPr>
+              <a:spcAft>
+                <a:spcPts val="1350"/>
+              </a:spcAft>
+            </a:pPr>
+            <a:r>
+              <a:rPr sz="3000" b="1">
+                <a:solidFill>
+                  <a:srgbClr val="E8793A"/>
+                </a:solidFill>
+                <a:latin typeface="Nunito Sans"/>
+              </a:rPr>
+              <a:t>3. </a:t>
+            </a:r>
+            <a:r>
+              <a:rPr sz="3000" b="0">
+                <a:solidFill>
+                  <a:srgbClr val="1F2A44"/>
+                </a:solidFill>
+                <a:latin typeface="Nunito Sans"/>
+              </a:rPr>
+              <a:t>Ponerse a prueba, explicar sin mirar y comprobar es la mejor medicina.</a:t>
+            </a:r>
+          </a:p>
+        </p:txBody>
+      </p:sp>
+    </p:spTree>
+  </p:cSld>
+  <p:clrMapOvr>
+    <a:masterClrMapping/>
+  </p:clrMapOvr>
+</p:sld>
+</file>
+
+<file path=ppt/slides/slide16.xml><?xml version="1.0" encoding="utf-8"?>
 <p:sld xmlns:a="http://schemas.openxmlformats.org/drawingml/2006/main" xmlns:p="http://schemas.openxmlformats.org/presentationml/2006/main" xmlns:r="http://schemas.openxmlformats.org/officeDocument/2006/relationships">
   <p:cSld>
     <p:bg>
@@ -4729,6 +5245,149 @@
                 </a:solidFill>
                 <a:latin typeface="Nunito Sans"/>
               </a:rPr>
+              <a:t>VÍDEO</a:t>
+            </a:r>
+          </a:p>
+        </p:txBody>
+      </p:sp>
+      <p:sp>
+        <p:nvSpPr>
+          <p:cNvPr id="3" name="TextBox 2"/>
+          <p:cNvSpPr txBox="1"/>
+          <p:nvPr/>
+        </p:nvSpPr>
+        <p:spPr>
+          <a:xfrm>
+            <a:off x="640000" y="760000"/>
+            <a:ext cx="10912000" cy="800000"/>
+          </a:xfrm>
+          <a:prstGeom prst="rect">
+            <a:avLst/>
+          </a:prstGeom>
+          <a:noFill/>
+        </p:spPr>
+        <p:txBody>
+          <a:bodyPr wrap="square">
+            <a:spAutoFit/>
+          </a:bodyPr>
+          <a:lstStyle/>
+          <a:p>
+            <a:pPr>
+              <a:spcAft>
+                <a:spcPts val="1620"/>
+              </a:spcAft>
+            </a:pPr>
+            <a:r>
+              <a:rPr sz="3600" b="1">
+                <a:solidFill>
+                  <a:srgbClr val="FBF7EF"/>
+                </a:solidFill>
+                <a:latin typeface="Fredoka"/>
+              </a:rPr>
+              <a:t>El efecto Dunning-Kruger explicado con cuidado</a:t>
+            </a:r>
+          </a:p>
+        </p:txBody>
+      </p:sp>
+      <p:sp>
+        <p:nvSpPr>
+          <p:cNvPr id="4" name="TextBox 3"/>
+          <p:cNvSpPr txBox="1"/>
+          <p:nvPr/>
+        </p:nvSpPr>
+        <p:spPr>
+          <a:xfrm>
+            <a:off x="640000" y="2200000"/>
+            <a:ext cx="10912000" cy="2000000"/>
+          </a:xfrm>
+          <a:prstGeom prst="rect">
+            <a:avLst/>
+          </a:prstGeom>
+          <a:noFill/>
+        </p:spPr>
+        <p:txBody>
+          <a:bodyPr wrap="square">
+            <a:spAutoFit/>
+          </a:bodyPr>
+          <a:lstStyle/>
+          <a:p>
+            <a:pPr>
+              <a:spcAft>
+                <a:spcPts val="1080"/>
+              </a:spcAft>
+            </a:pPr>
+            <a:r>
+              <a:rPr sz="2400" b="0">
+                <a:solidFill>
+                  <a:srgbClr val="C9D3E6"/>
+                </a:solidFill>
+                <a:latin typeface="Nunito Sans"/>
+              </a:rPr>
+              <a:t>Ver el estudio contado bien. Ojo: muchos vídeos lo exageran; elige uno riguroso.</a:t>
+            </a:r>
+          </a:p>
+        </p:txBody>
+      </p:sp>
+    </p:spTree>
+  </p:cSld>
+  <p:clrMapOvr>
+    <a:masterClrMapping/>
+  </p:clrMapOvr>
+</p:sld>
+</file>
+
+<file path=ppt/slides/slide17.xml><?xml version="1.0" encoding="utf-8"?>
+<p:sld xmlns:a="http://schemas.openxmlformats.org/drawingml/2006/main" xmlns:p="http://schemas.openxmlformats.org/presentationml/2006/main" xmlns:r="http://schemas.openxmlformats.org/officeDocument/2006/relationships">
+  <p:cSld>
+    <p:bg>
+      <p:bgPr>
+        <a:solidFill>
+          <a:srgbClr val="1F2A44"/>
+        </a:solidFill>
+        <a:effectLst/>
+      </p:bgPr>
+    </p:bg>
+    <p:spTree>
+      <p:nvGrpSpPr>
+        <p:cNvPr id="1" name=""/>
+        <p:cNvGrpSpPr/>
+        <p:nvPr/>
+      </p:nvGrpSpPr>
+      <p:grpSpPr/>
+      <p:sp>
+        <p:nvSpPr>
+          <p:cNvPr id="2" name="TextBox 1"/>
+          <p:cNvSpPr txBox="1"/>
+          <p:nvPr/>
+        </p:nvSpPr>
+        <p:spPr>
+          <a:xfrm>
+            <a:off x="640000" y="380000"/>
+            <a:ext cx="10912000" cy="420000"/>
+          </a:xfrm>
+          <a:prstGeom prst="rect">
+            <a:avLst/>
+          </a:prstGeom>
+          <a:noFill/>
+        </p:spPr>
+        <p:txBody>
+          <a:bodyPr wrap="square">
+            <a:spAutoFit/>
+          </a:bodyPr>
+          <a:lstStyle/>
+          <a:p>
+            <a:pPr>
+              <a:spcAft>
+                <a:spcPts val="630"/>
+              </a:spcAft>
+            </a:pPr>
+            <a:r>
+              <a:rPr sz="1400" b="1">
+                <a:solidFill>
+                  <a:srgbClr val="F4B183"/>
+                </a:solidFill>
+                <a:latin typeface="Nunito Sans"/>
+              </a:rPr>
               <a:t>AHORA, LA HOJA DEL DÍA</a:t>
             </a:r>
           </a:p>
@@ -5170,7 +5829,7 @@
                 </a:solidFill>
                 <a:latin typeface="Nunito Sans"/>
               </a:rPr>
-              <a:t>Sin apuntes. Junto a cada respuesta, marca «seguro» o «dudo».</a:t>
+              <a:t>1.ª pasada: sin apuntes, con bolígrafo. 2.ª pasada: con los apuntes, en otro color. Marca «seguro» o «dudo» en cada respuesta.</a:t>
             </a:r>
           </a:p>
         </p:txBody>
@@ -5322,7 +5981,7 @@
                 </a:solidFill>
                 <a:latin typeface="Nunito Sans"/>
               </a:rPr>
-              <a:t>Estar seguro con ______ no es exceso de confianza.  (sesión 47)</a:t>
+              <a:t>Mirar cuánto cuestan de verdad cosas iguales no es anclaje: es ______.  (sesión 47)</a:t>
             </a:r>
           </a:p>
           <a:p>
@@ -5347,7 +6006,7 @@
                 </a:solidFill>
                 <a:latin typeface="Nunito Sans"/>
               </a:rPr>
-              <a:t>Quien sabe poco de algo a menudo no ______ sus errores.  (sesión 47)</a:t>
+              <a:t>El ______ es la forma de presentar un dato.  (sesión 47)</a:t>
             </a:r>
           </a:p>
           <a:p>
@@ -5372,7 +6031,7 @@
                 </a:solidFill>
                 <a:latin typeface="Nunito Sans"/>
               </a:rPr>
-              <a:t>Un atajo mental no es lo mismo que un sesgo: casi siempre ______.  (sesión 43)</a:t>
+              <a:t>Las emociones ______, pero no mandan.  (sesión 43)</a:t>
             </a:r>
           </a:p>
         </p:txBody>
@@ -5524,7 +6183,7 @@
                 </a:solidFill>
                 <a:latin typeface="Nunito Sans"/>
               </a:rPr>
-              <a:t>Estar seguro con </a:t>
+              <a:t>Mirar cuánto cuestan de verdad cosas iguales no es anclaje: es </a:t>
             </a:r>
             <a:r>
               <a:rPr sz="2600" b="1">
@@ -5533,7 +6192,7 @@
                 </a:solidFill>
                 <a:latin typeface="Nunito Sans"/>
               </a:rPr>
-              <a:t>pruebas</a:t>
+              <a:t>informarse</a:t>
             </a:r>
             <a:r>
               <a:rPr sz="2600" b="0">
@@ -5542,7 +6201,7 @@
                 </a:solidFill>
                 <a:latin typeface="Nunito Sans"/>
               </a:rPr>
-              <a:t> no es exceso de confianza.  (sesión 47)</a:t>
+              <a:t>.  (sesión 47)</a:t>
             </a:r>
           </a:p>
           <a:p>
@@ -5567,7 +6226,7 @@
                 </a:solidFill>
                 <a:latin typeface="Nunito Sans"/>
               </a:rPr>
-              <a:t>Quien sabe poco de algo a menudo no </a:t>
+              <a:t>El </a:t>
             </a:r>
             <a:r>
               <a:rPr sz="2600" b="1">
@@ -5576,7 +6235,7 @@
                 </a:solidFill>
                 <a:latin typeface="Nunito Sans"/>
               </a:rPr>
-              <a:t>ve</a:t>
+              <a:t>encuadre</a:t>
             </a:r>
             <a:r>
               <a:rPr sz="2600" b="0">
@@ -5585,7 +6244,7 @@
                 </a:solidFill>
                 <a:latin typeface="Nunito Sans"/>
               </a:rPr>
-              <a:t> sus errores.  (sesión 47)</a:t>
+              <a:t> es la forma de presentar un dato.  (sesión 47)</a:t>
             </a:r>
           </a:p>
           <a:p>
@@ -5610,7 +6269,7 @@
                 </a:solidFill>
                 <a:latin typeface="Nunito Sans"/>
               </a:rPr>
-              <a:t>Un atajo mental no es lo mismo que un sesgo: casi siempre </a:t>
+              <a:t>Las emociones </a:t>
             </a:r>
             <a:r>
               <a:rPr sz="2600" b="1">
@@ -5619,7 +6278,7 @@
                 </a:solidFill>
                 <a:latin typeface="Nunito Sans"/>
               </a:rPr>
-              <a:t>acierta</a:t>
+              <a:t>informan</a:t>
             </a:r>
             <a:r>
               <a:rPr sz="2600" b="0">
@@ -5628,7 +6287,7 @@
                 </a:solidFill>
                 <a:latin typeface="Nunito Sans"/>
               </a:rPr>
-              <a:t>.  (sesión 43)</a:t>
+              <a:t>, pero no mandan.  (sesión 43)</a:t>
             </a:r>
           </a:p>
         </p:txBody>
@@ -5775,7 +6434,7 @@
                 </a:solidFill>
                 <a:latin typeface="Nunito Sans"/>
               </a:rPr>
-              <a:t>«Mi primo es el mejor mecánico: tiene cara de listo. Y sé que tengo razón, porque todo lo que leo me la da.»</a:t>
+              <a:t>Un chico: «El examen de mañana me lo sé. Lo he leído una vez y lo entiendo todo».</a:t>
             </a:r>
           </a:p>
         </p:txBody>
@@ -5814,7 +6473,7 @@
                 </a:solidFill>
                 <a:latin typeface="Nunito Sans"/>
               </a:rPr>
-              <a:t>¿Cuántos sesgos ves en estas dos frases?</a:t>
+              <a:t>¿Qué le pedirías para saber si de verdad se lo sabe?</a:t>
             </a:r>
           </a:p>
         </p:txBody>
@@ -5918,7 +6577,7 @@
                 </a:solidFill>
                 <a:latin typeface="Fredoka"/>
               </a:rPr>
-              <a:t>Repaso de la unidad 8</a:t>
+              <a:t>Más seguros que sabios</a:t>
             </a:r>
           </a:p>
         </p:txBody>
@@ -5983,7 +6642,7 @@
                 </a:solidFill>
                 <a:latin typeface="Nunito Sans"/>
               </a:rPr>
-              <a:t>BLOQUE 1 · REPASO DE LA UNIDAD 8</a:t>
+              <a:t>BLOQUE 1 · MÁS SEGUROS QUE SABIOS</a:t>
             </a:r>
           </a:p>
         </p:txBody>
@@ -6022,7 +6681,291 @@
                 </a:solidFill>
                 <a:latin typeface="Fredoka"/>
               </a:rPr>
-              <a:t>Sesgo cognitivo (sesión 43)</a:t>
+              <a:t>Exceso de confianza</a:t>
+            </a:r>
+          </a:p>
+        </p:txBody>
+      </p:sp>
+      <p:sp>
+        <p:nvSpPr>
+          <p:cNvPr id="4" name="Rectangle 3"/>
+          <p:cNvSpPr/>
+          <p:nvPr/>
+        </p:nvSpPr>
+        <p:spPr>
+          <a:xfrm>
+            <a:off x="640000" y="1650000"/>
+            <a:ext cx="10912000" cy="1150000"/>
+          </a:xfrm>
+          <a:prstGeom prst="rect">
+            <a:avLst/>
+          </a:prstGeom>
+          <a:solidFill>
+            <a:srgbClr val="EAF0F7"/>
+          </a:solidFill>
+          <a:ln>
+            <a:noFill/>
+          </a:ln>
+        </p:spPr>
+        <p:style>
+          <a:lnRef idx="1">
+            <a:schemeClr val="accent1"/>
+          </a:lnRef>
+          <a:fillRef idx="3">
+            <a:schemeClr val="accent1"/>
+          </a:fillRef>
+          <a:effectRef idx="2">
+            <a:schemeClr val="accent1"/>
+          </a:effectRef>
+          <a:fontRef idx="minor">
+            <a:schemeClr val="lt1"/>
+          </a:fontRef>
+        </p:style>
+        <p:txBody>
+          <a:bodyPr rtlCol="0" anchor="ctr"/>
+          <a:lstStyle/>
+          <a:p>
+            <a:pPr algn="ctr"/>
+          </a:p>
+        </p:txBody>
+      </p:sp>
+      <p:sp>
+        <p:nvSpPr>
+          <p:cNvPr id="5" name="TextBox 4"/>
+          <p:cNvSpPr txBox="1"/>
+          <p:nvPr/>
+        </p:nvSpPr>
+        <p:spPr>
+          <a:xfrm>
+            <a:off x="840000" y="1730000"/>
+            <a:ext cx="10512000" cy="1000000"/>
+          </a:xfrm>
+          <a:prstGeom prst="rect">
+            <a:avLst/>
+          </a:prstGeom>
+          <a:noFill/>
+        </p:spPr>
+        <p:txBody>
+          <a:bodyPr wrap="square" anchor="ctr">
+            <a:spAutoFit/>
+          </a:bodyPr>
+          <a:lstStyle/>
+          <a:p>
+            <a:pPr>
+              <a:spcAft>
+                <a:spcPts val="1260"/>
+              </a:spcAft>
+            </a:pPr>
+            <a:r>
+              <a:rPr sz="2800" b="1">
+                <a:solidFill>
+                  <a:srgbClr val="1F2A44"/>
+                </a:solidFill>
+                <a:latin typeface="Nunito Sans"/>
+              </a:rPr>
+              <a:t>Es estar más seguro de lo que sabemos, o de lo bien que lo hacemos, de lo que dicen las pruebas.</a:t>
+            </a:r>
+          </a:p>
+        </p:txBody>
+      </p:sp>
+      <p:sp>
+        <p:nvSpPr>
+          <p:cNvPr id="6" name="TextBox 5"/>
+          <p:cNvSpPr txBox="1"/>
+          <p:nvPr/>
+        </p:nvSpPr>
+        <p:spPr>
+          <a:xfrm>
+            <a:off x="640000" y="3000000"/>
+            <a:ext cx="10912000" cy="3458000"/>
+          </a:xfrm>
+          <a:prstGeom prst="rect">
+            <a:avLst/>
+          </a:prstGeom>
+          <a:noFill/>
+        </p:spPr>
+        <p:txBody>
+          <a:bodyPr wrap="square">
+            <a:spAutoFit/>
+          </a:bodyPr>
+          <a:lstStyle/>
+          <a:p>
+            <a:pPr>
+              <a:spcAft>
+                <a:spcPts val="1260"/>
+              </a:spcAft>
+            </a:pPr>
+            <a:r>
+              <a:rPr sz="2800" b="1">
+                <a:solidFill>
+                  <a:srgbClr val="E8793A"/>
+                </a:solidFill>
+                <a:latin typeface="Nunito Sans"/>
+              </a:rPr>
+              <a:t>• </a:t>
+            </a:r>
+            <a:r>
+              <a:rPr sz="2800" b="0">
+                <a:solidFill>
+                  <a:srgbClr val="1F2A44"/>
+                </a:solidFill>
+                <a:latin typeface="Nunito Sans"/>
+              </a:rPr>
+              <a:t>Sesión 31: sentirse seguro no es lo mismo que saber</a:t>
+            </a:r>
+          </a:p>
+          <a:p>
+            <a:pPr>
+              <a:spcAft>
+                <a:spcPts val="1260"/>
+              </a:spcAft>
+            </a:pPr>
+            <a:r>
+              <a:rPr sz="2800" b="1">
+                <a:solidFill>
+                  <a:srgbClr val="E8793A"/>
+                </a:solidFill>
+                <a:latin typeface="Nunito Sans"/>
+              </a:rPr>
+              <a:t>• </a:t>
+            </a:r>
+            <a:r>
+              <a:rPr sz="2800" b="0">
+                <a:solidFill>
+                  <a:srgbClr val="1F2A44"/>
+                </a:solidFill>
+                <a:latin typeface="Nunito Sans"/>
+              </a:rPr>
+              <a:t>Nos pasa a casi todos en algún tema</a:t>
+            </a:r>
+          </a:p>
+          <a:p>
+            <a:pPr>
+              <a:spcAft>
+                <a:spcPts val="1260"/>
+              </a:spcAft>
+            </a:pPr>
+            <a:r>
+              <a:rPr sz="2800" b="1">
+                <a:solidFill>
+                  <a:srgbClr val="E8793A"/>
+                </a:solidFill>
+                <a:latin typeface="Nunito Sans"/>
+              </a:rPr>
+              <a:t>• </a:t>
+            </a:r>
+            <a:r>
+              <a:rPr sz="2800" b="0">
+                <a:solidFill>
+                  <a:srgbClr val="1F2A44"/>
+                </a:solidFill>
+                <a:latin typeface="Nunito Sans"/>
+              </a:rPr>
+              <a:t>Es más fácil verlo en los demás que en uno mismo</a:t>
+            </a:r>
+          </a:p>
+        </p:txBody>
+      </p:sp>
+    </p:spTree>
+  </p:cSld>
+  <p:clrMapOvr>
+    <a:masterClrMapping/>
+  </p:clrMapOvr>
+</p:sld>
+</file>
+
+<file path=ppt/slides/slide7.xml><?xml version="1.0" encoding="utf-8"?>
+<p:sld xmlns:a="http://schemas.openxmlformats.org/drawingml/2006/main" xmlns:p="http://schemas.openxmlformats.org/presentationml/2006/main" xmlns:r="http://schemas.openxmlformats.org/officeDocument/2006/relationships">
+  <p:cSld>
+    <p:bg>
+      <p:bgPr>
+        <a:solidFill>
+          <a:srgbClr val="FBF7EF"/>
+        </a:solidFill>
+        <a:effectLst/>
+      </p:bgPr>
+    </p:bg>
+    <p:spTree>
+      <p:nvGrpSpPr>
+        <p:cNvPr id="1" name=""/>
+        <p:cNvGrpSpPr/>
+        <p:nvPr/>
+      </p:nvGrpSpPr>
+      <p:grpSpPr/>
+      <p:sp>
+        <p:nvSpPr>
+          <p:cNvPr id="2" name="TextBox 1"/>
+          <p:cNvSpPr txBox="1"/>
+          <p:nvPr/>
+        </p:nvSpPr>
+        <p:spPr>
+          <a:xfrm>
+            <a:off x="640000" y="380000"/>
+            <a:ext cx="10912000" cy="420000"/>
+          </a:xfrm>
+          <a:prstGeom prst="rect">
+            <a:avLst/>
+          </a:prstGeom>
+          <a:noFill/>
+        </p:spPr>
+        <p:txBody>
+          <a:bodyPr wrap="square">
+            <a:spAutoFit/>
+          </a:bodyPr>
+          <a:lstStyle/>
+          <a:p>
+            <a:pPr>
+              <a:spcAft>
+                <a:spcPts val="630"/>
+              </a:spcAft>
+            </a:pPr>
+            <a:r>
+              <a:rPr sz="1400" b="1">
+                <a:solidFill>
+                  <a:srgbClr val="E8793A"/>
+                </a:solidFill>
+                <a:latin typeface="Nunito Sans"/>
+              </a:rPr>
+              <a:t>BLOQUE 1 · MÁS SEGUROS QUE SABIOS</a:t>
+            </a:r>
+          </a:p>
+        </p:txBody>
+      </p:sp>
+      <p:sp>
+        <p:nvSpPr>
+          <p:cNvPr id="3" name="TextBox 2"/>
+          <p:cNvSpPr txBox="1"/>
+          <p:nvPr/>
+        </p:nvSpPr>
+        <p:spPr>
+          <a:xfrm>
+            <a:off x="640000" y="760000"/>
+            <a:ext cx="10912000" cy="800000"/>
+          </a:xfrm>
+          <a:prstGeom prst="rect">
+            <a:avLst/>
+          </a:prstGeom>
+          <a:noFill/>
+        </p:spPr>
+        <p:txBody>
+          <a:bodyPr wrap="square">
+            <a:spAutoFit/>
+          </a:bodyPr>
+          <a:lstStyle/>
+          <a:p>
+            <a:pPr>
+              <a:spcAft>
+                <a:spcPts val="1710"/>
+              </a:spcAft>
+            </a:pPr>
+            <a:r>
+              <a:rPr sz="3800" b="1">
+                <a:solidFill>
+                  <a:srgbClr val="1F2A44"/>
+                </a:solidFill>
+                <a:latin typeface="Fredoka"/>
+              </a:rPr>
+              <a:t>Formas de exceso de confianza</a:t>
             </a:r>
           </a:p>
         </p:txBody>
@@ -6062,7 +7005,7 @@
                           </a:solidFill>
                           <a:latin typeface="Fredoka"/>
                         </a:rPr>
-                        <a:t>Idea</a:t>
+                        <a:t>Forma</a:t>
                       </a:r>
                     </a:p>
                   </a:txBody>
@@ -6084,7 +7027,7 @@
                           </a:solidFill>
                           <a:latin typeface="Fredoka"/>
                         </a:rPr>
-                        <a:t>En pocas palabras</a:t>
+                        <a:t>Ejemplo</a:t>
                       </a:r>
                     </a:p>
                   </a:txBody>
@@ -6108,7 +7051,7 @@
                           </a:solidFill>
                           <a:latin typeface="Nunito Sans"/>
                         </a:rPr>
-                        <a:t>Atajo mental</a:t>
+                        <a:t>Creerse mejor que la mayoría</a:t>
                       </a:r>
                     </a:p>
                   </a:txBody>
@@ -6130,7 +7073,7 @@
                           </a:solidFill>
                           <a:latin typeface="Nunito Sans"/>
                         </a:rPr>
-                        <a:t>Forma rápida de decidir; casi siempre acierta</a:t>
+                        <a:t>Muchos conductores creen conducir mejor que la mayoría</a:t>
                       </a:r>
                     </a:p>
                   </a:txBody>
@@ -6154,7 +7097,7 @@
                           </a:solidFill>
                           <a:latin typeface="Nunito Sans"/>
                         </a:rPr>
-                        <a:t>Sesgo cognitivo</a:t>
+                        <a:t>Planear sin margen</a:t>
                       </a:r>
                     </a:p>
                   </a:txBody>
@@ -6176,7 +7119,7 @@
                           </a:solidFill>
                           <a:latin typeface="Nunito Sans"/>
                         </a:rPr>
-                        <a:t>Error que se repite de forma predecible</a:t>
+                        <a:t>«Hago el trabajo en una tarde»… y tardo tres</a:t>
                       </a:r>
                     </a:p>
                   </a:txBody>
@@ -6200,7 +7143,7 @@
                           </a:solidFill>
                           <a:latin typeface="Nunito Sans"/>
                         </a:rPr>
-                        <a:t>Pensar rápido y pensar despacio</a:t>
+                        <a:t>Estar seguro de una respuesta</a:t>
                       </a:r>
                     </a:p>
                   </a:txBody>
@@ -6222,7 +7165,7 @@
                           </a:solidFill>
                           <a:latin typeface="Nunito Sans"/>
                         </a:rPr>
-                        <a:t>Automático, sin esfuerzo / lento, con esfuerzo</a:t>
+                        <a:t>«Lo sé al 100 %»… y fallo</a:t>
                       </a:r>
                     </a:p>
                   </a:txBody>
@@ -6237,303 +7180,6 @@
           </a:graphicData>
         </a:graphic>
       </p:graphicFrame>
-    </p:spTree>
-  </p:cSld>
-  <p:clrMapOvr>
-    <a:masterClrMapping/>
-  </p:clrMapOvr>
-</p:sld>
-</file>
-
-<file path=ppt/slides/slide7.xml><?xml version="1.0" encoding="utf-8"?>
-<p:sld xmlns:a="http://schemas.openxmlformats.org/drawingml/2006/main" xmlns:p="http://schemas.openxmlformats.org/presentationml/2006/main" xmlns:r="http://schemas.openxmlformats.org/officeDocument/2006/relationships">
-  <p:cSld>
-    <p:bg>
-      <p:bgPr>
-        <a:solidFill>
-          <a:srgbClr val="FBF7EF"/>
-        </a:solidFill>
-        <a:effectLst/>
-      </p:bgPr>
-    </p:bg>
-    <p:spTree>
-      <p:nvGrpSpPr>
-        <p:cNvPr id="1" name=""/>
-        <p:cNvGrpSpPr/>
-        <p:nvPr/>
-      </p:nvGrpSpPr>
-      <p:grpSpPr/>
-      <p:sp>
-        <p:nvSpPr>
-          <p:cNvPr id="2" name="TextBox 1"/>
-          <p:cNvSpPr txBox="1"/>
-          <p:nvPr/>
-        </p:nvSpPr>
-        <p:spPr>
-          <a:xfrm>
-            <a:off x="640000" y="380000"/>
-            <a:ext cx="10912000" cy="420000"/>
-          </a:xfrm>
-          <a:prstGeom prst="rect">
-            <a:avLst/>
-          </a:prstGeom>
-          <a:noFill/>
-        </p:spPr>
-        <p:txBody>
-          <a:bodyPr wrap="square">
-            <a:spAutoFit/>
-          </a:bodyPr>
-          <a:lstStyle/>
-          <a:p>
-            <a:pPr>
-              <a:spcAft>
-                <a:spcPts val="630"/>
-              </a:spcAft>
-            </a:pPr>
-            <a:r>
-              <a:rPr sz="1400" b="1">
-                <a:solidFill>
-                  <a:srgbClr val="E8793A"/>
-                </a:solidFill>
-                <a:latin typeface="Nunito Sans"/>
-              </a:rPr>
-              <a:t>BLOQUE 1 · REPASO DE LA UNIDAD 8</a:t>
-            </a:r>
-          </a:p>
-        </p:txBody>
-      </p:sp>
-      <p:sp>
-        <p:nvSpPr>
-          <p:cNvPr id="3" name="TextBox 2"/>
-          <p:cNvSpPr txBox="1"/>
-          <p:nvPr/>
-        </p:nvSpPr>
-        <p:spPr>
-          <a:xfrm>
-            <a:off x="640000" y="760000"/>
-            <a:ext cx="10912000" cy="800000"/>
-          </a:xfrm>
-          <a:prstGeom prst="rect">
-            <a:avLst/>
-          </a:prstGeom>
-          <a:noFill/>
-        </p:spPr>
-        <p:txBody>
-          <a:bodyPr wrap="square">
-            <a:spAutoFit/>
-          </a:bodyPr>
-          <a:lstStyle/>
-          <a:p>
-            <a:pPr>
-              <a:spcAft>
-                <a:spcPts val="1710"/>
-              </a:spcAft>
-            </a:pPr>
-            <a:r>
-              <a:rPr sz="3800" b="1">
-                <a:solidFill>
-                  <a:srgbClr val="1F2A44"/>
-                </a:solidFill>
-                <a:latin typeface="Fredoka"/>
-              </a:rPr>
-              <a:t>Los cinco sesgos de la unidad (sesiones 44-47)</a:t>
-            </a:r>
-          </a:p>
-        </p:txBody>
-      </p:sp>
-      <p:sp>
-        <p:nvSpPr>
-          <p:cNvPr id="4" name="TextBox 3"/>
-          <p:cNvSpPr txBox="1"/>
-          <p:nvPr/>
-        </p:nvSpPr>
-        <p:spPr>
-          <a:xfrm>
-            <a:off x="640000" y="1650000"/>
-            <a:ext cx="10912000" cy="4808000"/>
-          </a:xfrm>
-          <a:prstGeom prst="rect">
-            <a:avLst/>
-          </a:prstGeom>
-          <a:noFill/>
-        </p:spPr>
-        <p:txBody>
-          <a:bodyPr wrap="square">
-            <a:spAutoFit/>
-          </a:bodyPr>
-          <a:lstStyle/>
-          <a:p>
-            <a:pPr>
-              <a:spcAft>
-                <a:spcPts val="1260"/>
-              </a:spcAft>
-            </a:pPr>
-            <a:r>
-              <a:rPr sz="2800" b="1">
-                <a:solidFill>
-                  <a:srgbClr val="E8793A"/>
-                </a:solidFill>
-                <a:latin typeface="Nunito Sans"/>
-              </a:rPr>
-              <a:t>• </a:t>
-            </a:r>
-            <a:r>
-              <a:rPr sz="2800" b="1">
-                <a:solidFill>
-                  <a:srgbClr val="1F2A44"/>
-                </a:solidFill>
-                <a:latin typeface="Nunito Sans"/>
-              </a:rPr>
-              <a:t>Confirmación:</a:t>
-            </a:r>
-            <a:r>
-              <a:rPr sz="2800" b="0">
-                <a:solidFill>
-                  <a:srgbClr val="1F2A44"/>
-                </a:solidFill>
-                <a:latin typeface="Nunito Sans"/>
-              </a:rPr>
-              <a:t> buscar y recordar solo lo que me da la razón</a:t>
-            </a:r>
-          </a:p>
-          <a:p>
-            <a:pPr>
-              <a:spcAft>
-                <a:spcPts val="1260"/>
-              </a:spcAft>
-            </a:pPr>
-            <a:r>
-              <a:rPr sz="2800" b="1">
-                <a:solidFill>
-                  <a:srgbClr val="E8793A"/>
-                </a:solidFill>
-                <a:latin typeface="Nunito Sans"/>
-              </a:rPr>
-              <a:t>• </a:t>
-            </a:r>
-            <a:r>
-              <a:rPr sz="2800" b="1">
-                <a:solidFill>
-                  <a:srgbClr val="1F2A44"/>
-                </a:solidFill>
-                <a:latin typeface="Nunito Sans"/>
-              </a:rPr>
-              <a:t>Halo:</a:t>
-            </a:r>
-            <a:r>
-              <a:rPr sz="2800" b="0">
-                <a:solidFill>
-                  <a:srgbClr val="1F2A44"/>
-                </a:solidFill>
-                <a:latin typeface="Nunito Sans"/>
-              </a:rPr>
-              <a:t> juzgar a alguien entero por un solo rasgo</a:t>
-            </a:r>
-          </a:p>
-          <a:p>
-            <a:pPr>
-              <a:spcAft>
-                <a:spcPts val="1260"/>
-              </a:spcAft>
-            </a:pPr>
-            <a:r>
-              <a:rPr sz="2800" b="1">
-                <a:solidFill>
-                  <a:srgbClr val="E8793A"/>
-                </a:solidFill>
-                <a:latin typeface="Nunito Sans"/>
-              </a:rPr>
-              <a:t>• </a:t>
-            </a:r>
-            <a:r>
-              <a:rPr sz="2800" b="1">
-                <a:solidFill>
-                  <a:srgbClr val="1F2A44"/>
-                </a:solidFill>
-                <a:latin typeface="Nunito Sans"/>
-              </a:rPr>
-              <a:t>Anclaje:</a:t>
-            </a:r>
-            <a:r>
-              <a:rPr sz="2800" b="0">
-                <a:solidFill>
-                  <a:srgbClr val="1F2A44"/>
-                </a:solidFill>
-                <a:latin typeface="Nunito Sans"/>
-              </a:rPr>
-              <a:t> el primer número me sirve de referencia sin querer</a:t>
-            </a:r>
-          </a:p>
-          <a:p>
-            <a:pPr>
-              <a:spcAft>
-                <a:spcPts val="1260"/>
-              </a:spcAft>
-            </a:pPr>
-            <a:r>
-              <a:rPr sz="2800" b="1">
-                <a:solidFill>
-                  <a:srgbClr val="E8793A"/>
-                </a:solidFill>
-                <a:latin typeface="Nunito Sans"/>
-              </a:rPr>
-              <a:t>• </a:t>
-            </a:r>
-            <a:r>
-              <a:rPr sz="2800" b="1">
-                <a:solidFill>
-                  <a:srgbClr val="1F2A44"/>
-                </a:solidFill>
-                <a:latin typeface="Nunito Sans"/>
-              </a:rPr>
-              <a:t>Encuadre:</a:t>
-            </a:r>
-            <a:r>
-              <a:rPr sz="2800" b="0">
-                <a:solidFill>
-                  <a:srgbClr val="1F2A44"/>
-                </a:solidFill>
-                <a:latin typeface="Nunito Sans"/>
-              </a:rPr>
-              <a:t> la forma de decir un dato cambia mi decisión</a:t>
-            </a:r>
-          </a:p>
-          <a:p>
-            <a:pPr>
-              <a:spcAft>
-                <a:spcPts val="1260"/>
-              </a:spcAft>
-            </a:pPr>
-            <a:r>
-              <a:rPr sz="2800" b="1">
-                <a:solidFill>
-                  <a:srgbClr val="E8793A"/>
-                </a:solidFill>
-                <a:latin typeface="Nunito Sans"/>
-              </a:rPr>
-              <a:t>• </a:t>
-            </a:r>
-            <a:r>
-              <a:rPr sz="2800" b="1">
-                <a:solidFill>
-                  <a:srgbClr val="1F2A44"/>
-                </a:solidFill>
-                <a:latin typeface="Nunito Sans"/>
-              </a:rPr>
-              <a:t>Exceso de confianza:</a:t>
-            </a:r>
-            <a:r>
-              <a:rPr sz="2800" b="0">
-                <a:solidFill>
-                  <a:srgbClr val="1F2A44"/>
-                </a:solidFill>
-                <a:latin typeface="Nunito Sans"/>
-              </a:rPr>
-              <a:t> creer que sé más de lo que sé</a:t>
-            </a:r>
-          </a:p>
-        </p:txBody>
-      </p:sp>
     </p:spTree>
   </p:cSld>
   <p:clrMapOvr>
@@ -6594,7 +7240,7 @@
                 </a:solidFill>
                 <a:latin typeface="Nunito Sans"/>
               </a:rPr>
-              <a:t>BLOQUE 1 · REPASO DE LA UNIDAD 8</a:t>
+              <a:t>BLOQUE 1 · MÁS SEGUROS QUE SABIOS</a:t>
             </a:r>
           </a:p>
         </p:txBody>
@@ -6633,267 +7279,243 @@
                 </a:solidFill>
                 <a:latin typeface="Fredoka"/>
               </a:rPr>
-              <a:t>Una pregunta para frenar cada sesgo</a:t>
-            </a:r>
-          </a:p>
-        </p:txBody>
-      </p:sp>
-      <p:graphicFrame>
-        <p:nvGraphicFramePr>
-          <p:cNvPr id="4" name="Table 3"/>
-          <p:cNvGraphicFramePr>
-            <a:graphicFrameLocks noGrp="1"/>
-          </p:cNvGraphicFramePr>
+              <a:t>El efecto Dunning-Kruger, con cuidado</a:t>
+            </a:r>
+          </a:p>
+        </p:txBody>
+      </p:sp>
+      <p:sp>
+        <p:nvSpPr>
+          <p:cNvPr id="4" name="Rectangle 3"/>
+          <p:cNvSpPr/>
           <p:nvPr/>
-        </p:nvGraphicFramePr>
-        <p:xfrm>
-          <a:off x="640000" y="1700000"/>
-          <a:ext cx="10912000" cy="3000000"/>
-        </p:xfrm>
-        <a:graphic>
-          <a:graphicData uri="http://schemas.openxmlformats.org/drawingml/2006/table">
-            <a:tbl>
-              <a:tblPr firstRow="1" bandRow="1">
-                <a:tableStyleId>{5C22544A-7EE6-4342-B048-85BDC9FD1C3A}</a:tableStyleId>
-              </a:tblPr>
-              <a:tblGrid>
-                <a:gridCol w="5456000"/>
-                <a:gridCol w="5456000"/>
-              </a:tblGrid>
-              <a:tr h="600000">
-                <a:tc>
-                  <a:txBody>
-                    <a:bodyPr/>
-                    <a:lstStyle/>
-                    <a:p>
-                      <a:r>
-                        <a:rPr sz="2000" b="1">
-                          <a:solidFill>
-                            <a:srgbClr val="FBF7EF"/>
-                          </a:solidFill>
-                          <a:latin typeface="Fredoka"/>
-                        </a:rPr>
-                        <a:t>Sesgo</a:t>
-                      </a:r>
-                    </a:p>
-                  </a:txBody>
-                  <a:tcPr>
-                    <a:solidFill>
-                      <a:srgbClr val="1F2A44"/>
-                    </a:solidFill>
-                  </a:tcPr>
-                </a:tc>
-                <a:tc>
-                  <a:txBody>
-                    <a:bodyPr/>
-                    <a:lstStyle/>
-                    <a:p>
-                      <a:r>
-                        <a:rPr sz="2000" b="1">
-                          <a:solidFill>
-                            <a:srgbClr val="FBF7EF"/>
-                          </a:solidFill>
-                          <a:latin typeface="Fredoka"/>
-                        </a:rPr>
-                        <a:t>Pregunta</a:t>
-                      </a:r>
-                    </a:p>
-                  </a:txBody>
-                  <a:tcPr>
-                    <a:solidFill>
-                      <a:srgbClr val="1F2A44"/>
-                    </a:solidFill>
-                  </a:tcPr>
-                </a:tc>
-              </a:tr>
-              <a:tr h="600000">
-                <a:tc>
-                  <a:txBody>
-                    <a:bodyPr/>
-                    <a:lstStyle/>
-                    <a:p>
-                      <a:r>
-                        <a:rPr sz="2000" b="0">
-                          <a:solidFill>
-                            <a:srgbClr val="1F2A44"/>
-                          </a:solidFill>
-                          <a:latin typeface="Nunito Sans"/>
-                        </a:rPr>
-                        <a:t>Confirmación</a:t>
-                      </a:r>
-                    </a:p>
-                  </a:txBody>
-                  <a:tcPr>
-                    <a:solidFill>
-                      <a:srgbClr val="FFFFFF"/>
-                    </a:solidFill>
-                  </a:tcPr>
-                </a:tc>
-                <a:tc>
-                  <a:txBody>
-                    <a:bodyPr/>
-                    <a:lstStyle/>
-                    <a:p>
-                      <a:r>
-                        <a:rPr sz="2000" b="0">
-                          <a:solidFill>
-                            <a:srgbClr val="1F2A44"/>
-                          </a:solidFill>
-                          <a:latin typeface="Nunito Sans"/>
-                        </a:rPr>
-                        <a:t>¿Qué me haría cambiar de opinión?</a:t>
-                      </a:r>
-                    </a:p>
-                  </a:txBody>
-                  <a:tcPr>
-                    <a:solidFill>
-                      <a:srgbClr val="FFFFFF"/>
-                    </a:solidFill>
-                  </a:tcPr>
-                </a:tc>
-              </a:tr>
-              <a:tr h="600000">
-                <a:tc>
-                  <a:txBody>
-                    <a:bodyPr/>
-                    <a:lstStyle/>
-                    <a:p>
-                      <a:r>
-                        <a:rPr sz="2000" b="0">
-                          <a:solidFill>
-                            <a:srgbClr val="1F2A44"/>
-                          </a:solidFill>
-                          <a:latin typeface="Nunito Sans"/>
-                        </a:rPr>
-                        <a:t>Halo</a:t>
-                      </a:r>
-                    </a:p>
-                  </a:txBody>
-                  <a:tcPr>
-                    <a:solidFill>
-                      <a:srgbClr val="EAF0F7"/>
-                    </a:solidFill>
-                  </a:tcPr>
-                </a:tc>
-                <a:tc>
-                  <a:txBody>
-                    <a:bodyPr/>
-                    <a:lstStyle/>
-                    <a:p>
-                      <a:r>
-                        <a:rPr sz="2000" b="0">
-                          <a:solidFill>
-                            <a:srgbClr val="1F2A44"/>
-                          </a:solidFill>
-                          <a:latin typeface="Nunito Sans"/>
-                        </a:rPr>
-                        <a:t>¿Qué sé de verdad, aparte de este rasgo?</a:t>
-                      </a:r>
-                    </a:p>
-                  </a:txBody>
-                  <a:tcPr>
-                    <a:solidFill>
-                      <a:srgbClr val="EAF0F7"/>
-                    </a:solidFill>
-                  </a:tcPr>
-                </a:tc>
-              </a:tr>
-              <a:tr h="600000">
-                <a:tc>
-                  <a:txBody>
-                    <a:bodyPr/>
-                    <a:lstStyle/>
-                    <a:p>
-                      <a:r>
-                        <a:rPr sz="2000" b="0">
-                          <a:solidFill>
-                            <a:srgbClr val="1F2A44"/>
-                          </a:solidFill>
-                          <a:latin typeface="Nunito Sans"/>
-                        </a:rPr>
-                        <a:t>Anclaje y encuadre</a:t>
-                      </a:r>
-                    </a:p>
-                  </a:txBody>
-                  <a:tcPr>
-                    <a:solidFill>
-                      <a:srgbClr val="FFFFFF"/>
-                    </a:solidFill>
-                  </a:tcPr>
-                </a:tc>
-                <a:tc>
-                  <a:txBody>
-                    <a:bodyPr/>
-                    <a:lstStyle/>
-                    <a:p>
-                      <a:r>
-                        <a:rPr sz="2000" b="0">
-                          <a:solidFill>
-                            <a:srgbClr val="1F2A44"/>
-                          </a:solidFill>
-                          <a:latin typeface="Nunito Sans"/>
-                        </a:rPr>
-                        <a:t>¿Y sin el primer número? ¿Y dicho al revés?</a:t>
-                      </a:r>
-                    </a:p>
-                  </a:txBody>
-                  <a:tcPr>
-                    <a:solidFill>
-                      <a:srgbClr val="FFFFFF"/>
-                    </a:solidFill>
-                  </a:tcPr>
-                </a:tc>
-              </a:tr>
-              <a:tr h="600000">
-                <a:tc>
-                  <a:txBody>
-                    <a:bodyPr/>
-                    <a:lstStyle/>
-                    <a:p>
-                      <a:r>
-                        <a:rPr sz="2000" b="0">
-                          <a:solidFill>
-                            <a:srgbClr val="1F2A44"/>
-                          </a:solidFill>
-                          <a:latin typeface="Nunito Sans"/>
-                        </a:rPr>
-                        <a:t>Exceso de confianza</a:t>
-                      </a:r>
-                    </a:p>
-                  </a:txBody>
-                  <a:tcPr>
-                    <a:solidFill>
-                      <a:srgbClr val="EAF0F7"/>
-                    </a:solidFill>
-                  </a:tcPr>
-                </a:tc>
-                <a:tc>
-                  <a:txBody>
-                    <a:bodyPr/>
-                    <a:lstStyle/>
-                    <a:p>
-                      <a:r>
-                        <a:rPr sz="2000" b="0">
-                          <a:solidFill>
-                            <a:srgbClr val="1F2A44"/>
-                          </a:solidFill>
-                          <a:latin typeface="Nunito Sans"/>
-                        </a:rPr>
-                        <a:t>¿Puedo explicarlo sin mirar?</a:t>
-                      </a:r>
-                    </a:p>
-                  </a:txBody>
-                  <a:tcPr>
-                    <a:solidFill>
-                      <a:srgbClr val="EAF0F7"/>
-                    </a:solidFill>
-                  </a:tcPr>
-                </a:tc>
-              </a:tr>
-            </a:tbl>
-          </a:graphicData>
-        </a:graphic>
-      </p:graphicFrame>
+        </p:nvSpPr>
+        <p:spPr>
+          <a:xfrm>
+            <a:off x="640000" y="1650000"/>
+            <a:ext cx="10912000" cy="1150000"/>
+          </a:xfrm>
+          <a:prstGeom prst="rect">
+            <a:avLst/>
+          </a:prstGeom>
+          <a:solidFill>
+            <a:srgbClr val="EAF0F7"/>
+          </a:solidFill>
+          <a:ln>
+            <a:noFill/>
+          </a:ln>
+        </p:spPr>
+        <p:style>
+          <a:lnRef idx="1">
+            <a:schemeClr val="accent1"/>
+          </a:lnRef>
+          <a:fillRef idx="3">
+            <a:schemeClr val="accent1"/>
+          </a:fillRef>
+          <a:effectRef idx="2">
+            <a:schemeClr val="accent1"/>
+          </a:effectRef>
+          <a:fontRef idx="minor">
+            <a:schemeClr val="lt1"/>
+          </a:fontRef>
+        </p:style>
+        <p:txBody>
+          <a:bodyPr rtlCol="0" anchor="ctr"/>
+          <a:lstStyle/>
+          <a:p>
+            <a:pPr algn="ctr"/>
+          </a:p>
+        </p:txBody>
+      </p:sp>
+      <p:sp>
+        <p:nvSpPr>
+          <p:cNvPr id="5" name="TextBox 4"/>
+          <p:cNvSpPr txBox="1"/>
+          <p:nvPr/>
+        </p:nvSpPr>
+        <p:spPr>
+          <a:xfrm>
+            <a:off x="840000" y="1730000"/>
+            <a:ext cx="10512000" cy="1000000"/>
+          </a:xfrm>
+          <a:prstGeom prst="rect">
+            <a:avLst/>
+          </a:prstGeom>
+          <a:noFill/>
+        </p:spPr>
+        <p:txBody>
+          <a:bodyPr wrap="square" anchor="ctr">
+            <a:spAutoFit/>
+          </a:bodyPr>
+          <a:lstStyle/>
+          <a:p>
+            <a:pPr>
+              <a:spcAft>
+                <a:spcPts val="1260"/>
+              </a:spcAft>
+            </a:pPr>
+            <a:r>
+              <a:rPr sz="2800" b="1">
+                <a:solidFill>
+                  <a:srgbClr val="1F2A44"/>
+                </a:solidFill>
+                <a:latin typeface="Nunito Sans"/>
+              </a:rPr>
+              <a:t>En un estudio de 1999, quienes peor lo hacían en una prueba solían creer que lo habían hecho mejor que la media.</a:t>
+            </a:r>
+          </a:p>
+        </p:txBody>
+      </p:sp>
+      <p:sp>
+        <p:nvSpPr>
+          <p:cNvPr id="6" name="TextBox 5"/>
+          <p:cNvSpPr txBox="1"/>
+          <p:nvPr/>
+        </p:nvSpPr>
+        <p:spPr>
+          <a:xfrm>
+            <a:off x="640000" y="3000000"/>
+            <a:ext cx="10912000" cy="3458000"/>
+          </a:xfrm>
+          <a:prstGeom prst="rect">
+            <a:avLst/>
+          </a:prstGeom>
+          <a:noFill/>
+        </p:spPr>
+        <p:txBody>
+          <a:bodyPr wrap="square">
+            <a:spAutoFit/>
+          </a:bodyPr>
+          <a:lstStyle/>
+          <a:p>
+            <a:pPr>
+              <a:spcAft>
+                <a:spcPts val="1260"/>
+              </a:spcAft>
+            </a:pPr>
+            <a:r>
+              <a:rPr sz="2800" b="1">
+                <a:solidFill>
+                  <a:srgbClr val="E8793A"/>
+                </a:solidFill>
+                <a:latin typeface="Nunito Sans"/>
+              </a:rPr>
+              <a:t>• </a:t>
+            </a:r>
+            <a:r>
+              <a:rPr sz="2800" b="0">
+                <a:solidFill>
+                  <a:srgbClr val="1F2A44"/>
+                </a:solidFill>
+                <a:latin typeface="Nunito Sans"/>
+              </a:rPr>
+              <a:t>Quien sabe poco de algo a menudo </a:t>
+            </a:r>
+            <a:r>
+              <a:rPr sz="2800" b="1">
+                <a:solidFill>
+                  <a:srgbClr val="1F2A44"/>
+                </a:solidFill>
+                <a:latin typeface="Nunito Sans"/>
+              </a:rPr>
+              <a:t>no ve</a:t>
+            </a:r>
+            <a:r>
+              <a:rPr sz="2800" b="0">
+                <a:solidFill>
+                  <a:srgbClr val="1F2A44"/>
+                </a:solidFill>
+                <a:latin typeface="Nunito Sans"/>
+              </a:rPr>
+              <a:t> sus errores</a:t>
+            </a:r>
+          </a:p>
+          <a:p>
+            <a:pPr>
+              <a:spcAft>
+                <a:spcPts val="1260"/>
+              </a:spcAft>
+            </a:pPr>
+            <a:r>
+              <a:rPr sz="2800" b="1">
+                <a:solidFill>
+                  <a:srgbClr val="E8793A"/>
+                </a:solidFill>
+                <a:latin typeface="Nunito Sans"/>
+              </a:rPr>
+              <a:t>• </a:t>
+            </a:r>
+            <a:r>
+              <a:rPr sz="2800" b="0">
+                <a:solidFill>
+                  <a:srgbClr val="1F2A44"/>
+                </a:solidFill>
+                <a:latin typeface="Nunito Sans"/>
+              </a:rPr>
+              <a:t>Los mejores, en cambio, se valoraban un poco por debajo</a:t>
+            </a:r>
+          </a:p>
+          <a:p>
+            <a:pPr>
+              <a:spcAft>
+                <a:spcPts val="1260"/>
+              </a:spcAft>
+            </a:pPr>
+            <a:r>
+              <a:rPr sz="2800" b="1">
+                <a:solidFill>
+                  <a:srgbClr val="E8793A"/>
+                </a:solidFill>
+                <a:latin typeface="Nunito Sans"/>
+              </a:rPr>
+              <a:t>• </a:t>
+            </a:r>
+            <a:r>
+              <a:rPr sz="2800" b="1">
+                <a:solidFill>
+                  <a:srgbClr val="1F2A44"/>
+                </a:solidFill>
+                <a:latin typeface="Nunito Sans"/>
+              </a:rPr>
+              <a:t>Ojo:</a:t>
+            </a:r>
+            <a:r>
+              <a:rPr sz="2800" b="0">
+                <a:solidFill>
+                  <a:srgbClr val="1F2A44"/>
+                </a:solidFill>
+                <a:latin typeface="Nunito Sans"/>
+              </a:rPr>
+              <a:t> no dice que quien sabe poco se crea un genio</a:t>
+            </a:r>
+          </a:p>
+          <a:p>
+            <a:pPr>
+              <a:spcAft>
+                <a:spcPts val="1260"/>
+              </a:spcAft>
+            </a:pPr>
+            <a:r>
+              <a:rPr sz="2800" b="1">
+                <a:solidFill>
+                  <a:srgbClr val="E8793A"/>
+                </a:solidFill>
+                <a:latin typeface="Nunito Sans"/>
+              </a:rPr>
+              <a:t>• </a:t>
+            </a:r>
+            <a:r>
+              <a:rPr sz="2800" b="0">
+                <a:solidFill>
+                  <a:srgbClr val="1F2A44"/>
+                </a:solidFill>
+                <a:latin typeface="Nunito Sans"/>
+              </a:rPr>
+              <a:t>Se discute: parte puede ser un efecto de la estadística</a:t>
+            </a:r>
+          </a:p>
+        </p:txBody>
+      </p:sp>
     </p:spTree>
   </p:cSld>
   <p:clrMapOvr>
@@ -6908,7 +7530,7 @@
     <p:bg>
       <p:bgPr>
         <a:solidFill>
-          <a:srgbClr val="FBF7EF"/>
+          <a:srgbClr val="1F2A44"/>
         </a:solidFill>
         <a:effectLst/>
       </p:bgPr>
@@ -6928,8 +7550,8 @@
         </p:nvSpPr>
         <p:spPr>
           <a:xfrm>
-            <a:off x="640000" y="380000"/>
-            <a:ext cx="10912000" cy="420000"/>
+            <a:off x="640000" y="2300000"/>
+            <a:ext cx="10912000" cy="500000"/>
           </a:xfrm>
           <a:prstGeom prst="rect">
             <a:avLst/>
@@ -6944,17 +7566,17 @@
           <a:p>
             <a:pPr>
               <a:spcAft>
-                <a:spcPts val="630"/>
-              </a:spcAft>
-            </a:pPr>
-            <a:r>
-              <a:rPr sz="1400" b="1">
-                <a:solidFill>
-                  <a:srgbClr val="E8793A"/>
-                </a:solidFill>
-                <a:latin typeface="Nunito Sans"/>
-              </a:rPr>
-              <a:t>BLOQUE 1 · REPASO DE LA UNIDAD 8</a:t>
+                <a:spcPts val="810"/>
+              </a:spcAft>
+            </a:pPr>
+            <a:r>
+              <a:rPr sz="1800" b="1">
+                <a:solidFill>
+                  <a:srgbClr val="F4B183"/>
+                </a:solidFill>
+                <a:latin typeface="Nunito Sans"/>
+              </a:rPr>
+              <a:t>BLOQUE 2</a:t>
             </a:r>
           </a:p>
         </p:txBody>
@@ -6967,8 +7589,8 @@
         </p:nvSpPr>
         <p:spPr>
           <a:xfrm>
-            <a:off x="640000" y="1500000"/>
-            <a:ext cx="10912000" cy="3000000"/>
+            <a:off x="640000" y="2800000"/>
+            <a:ext cx="10912000" cy="800000"/>
           </a:xfrm>
           <a:prstGeom prst="rect">
             <a:avLst/>
@@ -6983,56 +7605,17 @@
           <a:p>
             <a:pPr>
               <a:spcAft>
-                <a:spcPts val="1530"/>
-              </a:spcAft>
-            </a:pPr>
-            <a:r>
-              <a:rPr sz="3400" b="1">
-                <a:solidFill>
-                  <a:srgbClr val="1F2A44"/>
-                </a:solidFill>
-                <a:latin typeface="Nunito Sans"/>
-              </a:rPr>
-              <a:t>El primer principio es que no debes engañarte a ti mismo, y tú eres la persona más fácil de engañar.</a:t>
-            </a:r>
-          </a:p>
-        </p:txBody>
-      </p:sp>
-      <p:sp>
-        <p:nvSpPr>
-          <p:cNvPr id="4" name="TextBox 3"/>
-          <p:cNvSpPr txBox="1"/>
-          <p:nvPr/>
-        </p:nvSpPr>
-        <p:spPr>
-          <a:xfrm>
-            <a:off x="640000" y="4700000"/>
-            <a:ext cx="10912000" cy="600000"/>
-          </a:xfrm>
-          <a:prstGeom prst="rect">
-            <a:avLst/>
-          </a:prstGeom>
-          <a:noFill/>
-        </p:spPr>
-        <p:txBody>
-          <a:bodyPr wrap="square">
-            <a:spAutoFit/>
-          </a:bodyPr>
-          <a:lstStyle/>
-          <a:p>
-            <a:pPr>
-              <a:spcAft>
-                <a:spcPts val="990"/>
-              </a:spcAft>
-            </a:pPr>
-            <a:r>
-              <a:rPr sz="2200" b="0">
-                <a:solidFill>
-                  <a:srgbClr val="4A5568"/>
-                </a:solidFill>
-                <a:latin typeface="Nunito Sans"/>
-              </a:rPr>
-              <a:t>Richard Feynman, discurso en Caltech (1974)</a:t>
+                <a:spcPts val="2160"/>
+              </a:spcAft>
+            </a:pPr>
+            <a:r>
+              <a:rPr sz="4800" b="1">
+                <a:solidFill>
+                  <a:srgbClr val="FBF7EF"/>
+                </a:solidFill>
+                <a:latin typeface="Fredoka"/>
+              </a:rPr>
+              <a:t>Casos resueltos</a:t>
             </a:r>
           </a:p>
         </p:txBody>
